--- a/aca/TheContextractors_H4R2026_Ch11.pptx
+++ b/aca/TheContextractors_H4R2026_Ch11.pptx
@@ -5,15 +5,17 @@
     <p:sldMasterId id="2147483648" r:id="rId4"/>
   </p:sldMasterIdLst>
   <p:sldIdLst>
-    <p:sldId id="256" r:id="rId6"/>
-    <p:sldId id="257" r:id="rId5"/>
-    <p:sldId id="258" r:id="rId12"/>
-    <p:sldId id="259" r:id="rId13"/>
-    <p:sldId id="260" r:id="rId14"/>
-    <p:sldId id="261" r:id="rId15"/>
-    <p:sldId id="262" r:id="rId16"/>
-    <p:sldId id="263" r:id="rId17"/>
-    <p:sldId id="264" r:id="rId18"/>
+    <p:sldId id="256" r:id="rId5"/>
+    <p:sldId id="257" r:id="rId6"/>
+    <p:sldId id="258" r:id="rId7"/>
+    <p:sldId id="266" r:id="rId8"/>
+    <p:sldId id="265" r:id="rId9"/>
+    <p:sldId id="259" r:id="rId10"/>
+    <p:sldId id="260" r:id="rId11"/>
+    <p:sldId id="261" r:id="rId12"/>
+    <p:sldId id="262" r:id="rId13"/>
+    <p:sldId id="263" r:id="rId14"/>
+    <p:sldId id="264" r:id="rId15"/>
   </p:sldIdLst>
   <p:sldSz cx="12192000" cy="6858000"/>
   <p:notesSz cx="6858000" cy="9144000"/>
@@ -331,7 +333,7 @@
           <a:p>
             <a:fld id="{47371D93-8784-4C02-8B2C-86355AB378F9}" type="slidenum">
               <a:rPr lang="de-DE" smtClean="0"/>
-              <a:t>‹#›</a:t>
+              <a:t>‹Nr.›</a:t>
             </a:fld>
             <a:endParaRPr lang="de-DE"/>
           </a:p>
@@ -531,7 +533,7 @@
           <a:p>
             <a:fld id="{47371D93-8784-4C02-8B2C-86355AB378F9}" type="slidenum">
               <a:rPr lang="de-DE" smtClean="0"/>
-              <a:t>‹#›</a:t>
+              <a:t>‹Nr.›</a:t>
             </a:fld>
             <a:endParaRPr lang="de-DE"/>
           </a:p>
@@ -741,7 +743,7 @@
           <a:p>
             <a:fld id="{47371D93-8784-4C02-8B2C-86355AB378F9}" type="slidenum">
               <a:rPr lang="de-DE" smtClean="0"/>
-              <a:t>‹#›</a:t>
+              <a:t>‹Nr.›</a:t>
             </a:fld>
             <a:endParaRPr lang="de-DE"/>
           </a:p>
@@ -941,7 +943,7 @@
           <a:p>
             <a:fld id="{47371D93-8784-4C02-8B2C-86355AB378F9}" type="slidenum">
               <a:rPr lang="de-DE" smtClean="0"/>
-              <a:t>‹#›</a:t>
+              <a:t>‹Nr.›</a:t>
             </a:fld>
             <a:endParaRPr lang="de-DE"/>
           </a:p>
@@ -1217,7 +1219,7 @@
           <a:p>
             <a:fld id="{47371D93-8784-4C02-8B2C-86355AB378F9}" type="slidenum">
               <a:rPr lang="de-DE" smtClean="0"/>
-              <a:t>‹#›</a:t>
+              <a:t>‹Nr.›</a:t>
             </a:fld>
             <a:endParaRPr lang="de-DE"/>
           </a:p>
@@ -1485,7 +1487,7 @@
           <a:p>
             <a:fld id="{47371D93-8784-4C02-8B2C-86355AB378F9}" type="slidenum">
               <a:rPr lang="de-DE" smtClean="0"/>
-              <a:t>‹#›</a:t>
+              <a:t>‹Nr.›</a:t>
             </a:fld>
             <a:endParaRPr lang="de-DE"/>
           </a:p>
@@ -1900,7 +1902,7 @@
           <a:p>
             <a:fld id="{47371D93-8784-4C02-8B2C-86355AB378F9}" type="slidenum">
               <a:rPr lang="de-DE" smtClean="0"/>
-              <a:t>‹#›</a:t>
+              <a:t>‹Nr.›</a:t>
             </a:fld>
             <a:endParaRPr lang="de-DE"/>
           </a:p>
@@ -2042,7 +2044,7 @@
           <a:p>
             <a:fld id="{47371D93-8784-4C02-8B2C-86355AB378F9}" type="slidenum">
               <a:rPr lang="de-DE" smtClean="0"/>
-              <a:t>‹#›</a:t>
+              <a:t>‹Nr.›</a:t>
             </a:fld>
             <a:endParaRPr lang="de-DE"/>
           </a:p>
@@ -2155,7 +2157,7 @@
           <a:p>
             <a:fld id="{47371D93-8784-4C02-8B2C-86355AB378F9}" type="slidenum">
               <a:rPr lang="de-DE" smtClean="0"/>
-              <a:t>‹#›</a:t>
+              <a:t>‹Nr.›</a:t>
             </a:fld>
             <a:endParaRPr lang="de-DE"/>
           </a:p>
@@ -2468,7 +2470,7 @@
           <a:p>
             <a:fld id="{47371D93-8784-4C02-8B2C-86355AB378F9}" type="slidenum">
               <a:rPr lang="de-DE" smtClean="0"/>
-              <a:t>‹#›</a:t>
+              <a:t>‹Nr.›</a:t>
             </a:fld>
             <a:endParaRPr lang="de-DE"/>
           </a:p>
@@ -2761,7 +2763,7 @@
           <a:p>
             <a:fld id="{47371D93-8784-4C02-8B2C-86355AB378F9}" type="slidenum">
               <a:rPr lang="de-DE" smtClean="0"/>
-              <a:t>‹#›</a:t>
+              <a:t>‹Nr.›</a:t>
             </a:fld>
             <a:endParaRPr lang="de-DE"/>
           </a:p>
@@ -3038,58 +3040,9 @@
           <a:p>
             <a:fld id="{47371D93-8784-4C02-8B2C-86355AB378F9}" type="slidenum">
               <a:rPr lang="de-DE" smtClean="0"/>
-              <a:t>‹#›</a:t>
+              <a:t>‹Nr.›</a:t>
             </a:fld>
             <a:endParaRPr lang="de-DE"/>
-          </a:p>
-        </p:txBody>
-      </p:sp>
-      <p:sp>
-        <p:nvSpPr>
-          <p:cNvPr id="9" name="Textfeld 8">
-            <a:extLst>
-              <a:ext uri="{FF2B5EF4-FFF2-40B4-BE49-F238E27FC236}">
-                <a16:creationId xmlns:a16="http://schemas.microsoft.com/office/drawing/2014/main" id="{3D258550-D773-9960-BD4F-07D9A5241D57}"/>
-              </a:ext>
-            </a:extLst>
-          </p:cNvPr>
-          <p:cNvSpPr txBox="1"/>
-          <p:nvPr userDrawn="1">
-            <p:extLst>
-              <p:ext uri="{1162E1C5-73C7-4A58-AE30-91384D911F3F}">
-                <p184:classification xmlns:p184="http://schemas.microsoft.com/office/powerpoint/2018/4/main" val="ftr"/>
-              </p:ext>
-            </p:extLst>
-          </p:nvPr>
-        </p:nvSpPr>
-        <p:spPr>
-          <a:xfrm>
-            <a:off x="63500" y="6642100"/>
-            <a:ext cx="1384300" cy="152400"/>
-          </a:xfrm>
-          <a:prstGeom prst="rect">
-            <a:avLst/>
-          </a:prstGeom>
-        </p:spPr>
-        <p:txBody>
-          <a:bodyPr horzOverflow="overflow" lIns="0" tIns="0" rIns="0" bIns="0">
-            <a:spAutoFit/>
-          </a:bodyPr>
-          <a:lstStyle/>
-          <a:p>
-            <a:pPr algn="l"/>
-            <a:r>
-              <a:rPr lang="de-DE" sz="1000">
-                <a:solidFill>
-                  <a:srgbClr val="FFC000">
-                    <a:alpha val="50000"/>
-                  </a:srgbClr>
-                </a:solidFill>
-                <a:latin typeface="Calibri" panose="020F0502020204030204" pitchFamily="34" charset="0"/>
-                <a:cs typeface="Calibri" panose="020F0502020204030204" pitchFamily="34" charset="0"/>
-              </a:rPr>
-              <a:t>TLP gelb (Adressatenkreis)</a:t>
-            </a:r>
           </a:p>
         </p:txBody>
       </p:sp>
@@ -3428,7 +3381,7 @@
 </file>
 
 <file path=ppt/slides/slide1.xml><?xml version="1.0" encoding="utf-8"?>
-<p:sld xmlns:a="http://schemas.openxmlformats.org/drawingml/2006/main" xmlns:p="http://schemas.openxmlformats.org/presentationml/2006/main" xmlns:r="http://schemas.openxmlformats.org/officeDocument/2006/relationships">
+<p:sld xmlns:a="http://schemas.openxmlformats.org/drawingml/2006/main" xmlns:r="http://schemas.openxmlformats.org/officeDocument/2006/relationships" xmlns:p="http://schemas.openxmlformats.org/presentationml/2006/main">
   <p:cSld>
     <p:spTree>
       <p:nvGrpSpPr>
@@ -3436,7 +3389,14 @@
         <p:cNvGrpSpPr/>
         <p:nvPr/>
       </p:nvGrpSpPr>
-      <p:grpSpPr/>
+      <p:grpSpPr>
+        <a:xfrm>
+          <a:off x="0" y="0"/>
+          <a:ext cx="0" cy="0"/>
+          <a:chOff x="0" y="0"/>
+          <a:chExt cx="0" cy="0"/>
+        </a:xfrm>
+      </p:grpSpPr>
       <p:sp>
         <p:nvSpPr>
           <p:cNvPr id="2" name="Title 1"/>
@@ -3480,6 +3440,216 @@
           <a:p>
             <a:r>
               <a:t>Hack4Rail 2026 – Team A38</a:t>
+            </a:r>
+          </a:p>
+        </p:txBody>
+      </p:sp>
+    </p:spTree>
+  </p:cSld>
+  <p:clrMapOvr>
+    <a:masterClrMapping/>
+  </p:clrMapOvr>
+</p:sld>
+</file>
+
+<file path=ppt/slides/slide10.xml><?xml version="1.0" encoding="utf-8"?>
+<p:sld xmlns:a="http://schemas.openxmlformats.org/drawingml/2006/main" xmlns:r="http://schemas.openxmlformats.org/officeDocument/2006/relationships" xmlns:p="http://schemas.openxmlformats.org/presentationml/2006/main">
+  <p:cSld>
+    <p:spTree>
+      <p:nvGrpSpPr>
+        <p:cNvPr id="1" name=""/>
+        <p:cNvGrpSpPr/>
+        <p:nvPr/>
+      </p:nvGrpSpPr>
+      <p:grpSpPr>
+        <a:xfrm>
+          <a:off x="0" y="0"/>
+          <a:ext cx="0" cy="0"/>
+          <a:chOff x="0" y="0"/>
+          <a:chExt cx="0" cy="0"/>
+        </a:xfrm>
+      </p:grpSpPr>
+      <p:sp>
+        <p:nvSpPr>
+          <p:cNvPr id="2" name="Title 1"/>
+          <p:cNvSpPr>
+            <a:spLocks noGrp="1"/>
+          </p:cNvSpPr>
+          <p:nvPr>
+            <p:ph type="title"/>
+          </p:nvPr>
+        </p:nvSpPr>
+        <p:spPr/>
+        <p:txBody>
+          <a:bodyPr/>
+          <a:lstStyle/>
+          <a:p>
+            <a:r>
+              <a:t>Roadmap: Manual → Automated</a:t>
+            </a:r>
+          </a:p>
+        </p:txBody>
+      </p:sp>
+      <p:sp>
+        <p:nvSpPr>
+          <p:cNvPr id="3" name="Content Placeholder 2"/>
+          <p:cNvSpPr>
+            <a:spLocks noGrp="1"/>
+          </p:cNvSpPr>
+          <p:nvPr>
+            <p:ph idx="1"/>
+          </p:nvPr>
+        </p:nvSpPr>
+        <p:spPr/>
+        <p:txBody>
+          <a:bodyPr>
+            <a:normAutofit fontScale="55000" lnSpcReduction="20000"/>
+          </a:bodyPr>
+          <a:lstStyle/>
+          <a:p>
+            <a:r>
+              <a:t>TODAY (Hackathon)</a:t>
+            </a:r>
+          </a:p>
+          <a:p>
+            <a:r>
+              <a:t>  1 contract, manual QA, 2 LLMs</a:t>
+            </a:r>
+          </a:p>
+          <a:p>
+            <a:endParaRPr/>
+          </a:p>
+          <a:p>
+            <a:r>
+              <a:t>NEXT (3–6 months)</a:t>
+            </a:r>
+          </a:p>
+          <a:p>
+            <a:r>
+              <a:t>  Batch 5,000 contracts, Human-in-the-Loop, SAP Prefill</a:t>
+            </a:r>
+          </a:p>
+          <a:p>
+            <a:endParaRPr/>
+          </a:p>
+          <a:p>
+            <a:r>
+              <a:t>FUTURE</a:t>
+            </a:r>
+          </a:p>
+          <a:p>
+            <a:r>
+              <a:t>  Asset linking (contract → physical structure via UUID)</a:t>
+            </a:r>
+          </a:p>
+          <a:p>
+            <a:r>
+              <a:t>  Contract relationship graph</a:t>
+            </a:r>
+          </a:p>
+          <a:p>
+            <a:r>
+              <a:t>  Cross-railway: DB / ÖBB / SBB</a:t>
+            </a:r>
+          </a:p>
+          <a:p>
+            <a:r>
+              <a:t>  Compliance check vs. OSCAL4Rail (Challenge 1)</a:t>
+            </a:r>
+          </a:p>
+          <a:p>
+            <a:endParaRPr/>
+          </a:p>
+          <a:p>
+            <a:r>
+              <a:t>⚡ The AI proposes, the human decides.</a:t>
+            </a:r>
+          </a:p>
+          <a:p>
+            <a:r>
+              <a:t>   Uncertain fields always go to human verification.</a:t>
+            </a:r>
+          </a:p>
+        </p:txBody>
+      </p:sp>
+    </p:spTree>
+  </p:cSld>
+  <p:clrMapOvr>
+    <a:masterClrMapping/>
+  </p:clrMapOvr>
+</p:sld>
+</file>
+
+<file path=ppt/slides/slide11.xml><?xml version="1.0" encoding="utf-8"?>
+<p:sld xmlns:a="http://schemas.openxmlformats.org/drawingml/2006/main" xmlns:r="http://schemas.openxmlformats.org/officeDocument/2006/relationships" xmlns:p="http://schemas.openxmlformats.org/presentationml/2006/main">
+  <p:cSld>
+    <p:spTree>
+      <p:nvGrpSpPr>
+        <p:cNvPr id="1" name=""/>
+        <p:cNvGrpSpPr/>
+        <p:nvPr/>
+      </p:nvGrpSpPr>
+      <p:grpSpPr>
+        <a:xfrm>
+          <a:off x="0" y="0"/>
+          <a:ext cx="0" cy="0"/>
+          <a:chOff x="0" y="0"/>
+          <a:chExt cx="0" cy="0"/>
+        </a:xfrm>
+      </p:grpSpPr>
+      <p:sp>
+        <p:nvSpPr>
+          <p:cNvPr id="2" name="Title 1"/>
+          <p:cNvSpPr>
+            <a:spLocks noGrp="1"/>
+          </p:cNvSpPr>
+          <p:nvPr>
+            <p:ph type="ctrTitle"/>
+          </p:nvPr>
+        </p:nvSpPr>
+        <p:spPr/>
+        <p:txBody>
+          <a:bodyPr/>
+          <a:lstStyle/>
+          <a:p>
+            <a:r>
+              <a:t>We are the ConTextractors.</a:t>
+            </a:r>
+          </a:p>
+        </p:txBody>
+      </p:sp>
+      <p:sp>
+        <p:nvSpPr>
+          <p:cNvPr id="3" name="Subtitle 2"/>
+          <p:cNvSpPr>
+            <a:spLocks noGrp="1"/>
+          </p:cNvSpPr>
+          <p:nvPr>
+            <p:ph type="subTitle" idx="1"/>
+          </p:nvPr>
+        </p:nvSpPr>
+        <p:spPr/>
+        <p:txBody>
+          <a:bodyPr>
+            <a:normAutofit lnSpcReduction="10000"/>
+          </a:bodyPr>
+          <a:lstStyle/>
+          <a:p>
+            <a:r>
+              <a:t>Contract + Text + Extractors</a:t>
+            </a:r>
+          </a:p>
+          <a:p>
+            <a:endParaRPr/>
+          </a:p>
+          <a:p>
+            <a:r>
+              <a:t>From Aktenordner to structured, validated data.</a:t>
+            </a:r>
+          </a:p>
+          <a:p>
+            <a:r>
+              <a:t>With source references. In seconds, not days.</a:t>
             </a:r>
           </a:p>
         </p:txBody>
@@ -3493,7 +3663,7 @@
 </file>
 
 <file path=ppt/slides/slide2.xml><?xml version="1.0" encoding="utf-8"?>
-<p:sld xmlns:a="http://schemas.openxmlformats.org/drawingml/2006/main" xmlns:p="http://schemas.openxmlformats.org/presentationml/2006/main" xmlns:r="http://schemas.openxmlformats.org/officeDocument/2006/relationships">
+<p:sld xmlns:a="http://schemas.openxmlformats.org/drawingml/2006/main" xmlns:r="http://schemas.openxmlformats.org/officeDocument/2006/relationships" xmlns:p="http://schemas.openxmlformats.org/presentationml/2006/main" show="0">
   <p:cSld>
     <p:spTree>
       <p:nvGrpSpPr>
@@ -3501,7 +3671,14 @@
         <p:cNvGrpSpPr/>
         <p:nvPr/>
       </p:nvGrpSpPr>
-      <p:grpSpPr/>
+      <p:grpSpPr>
+        <a:xfrm>
+          <a:off x="0" y="0"/>
+          <a:ext cx="0" cy="0"/>
+          <a:chOff x="0" y="0"/>
+          <a:chExt cx="0" cy="0"/>
+        </a:xfrm>
+      </p:grpSpPr>
       <p:sp>
         <p:nvSpPr>
           <p:cNvPr id="2" name="Title 1"/>
@@ -3518,6 +3695,7 @@
           <a:lstStyle/>
           <a:p>
             <a:r>
+              <a:rPr dirty="0"/>
               <a:t>The Problem</a:t>
             </a:r>
           </a:p>
@@ -3539,32 +3717,49 @@
           <a:lstStyle/>
           <a:p>
             <a:r>
-              <a:t>5,000+ infrastructure contracts (PDF, scans, handwritten)</a:t>
-            </a:r>
-          </a:p>
-          <a:p>
-            <a:r>
-              <a:t>Manual classification into SAP/ContrAct</a:t>
-            </a:r>
-          </a:p>
-          <a:p>
-            <a:r>
+              <a:rPr lang="de-CH" dirty="0"/>
+              <a:t>10’</a:t>
+            </a:r>
+            <a:r>
+              <a:rPr dirty="0"/>
+              <a:t>000+ infrastructure contracts (PDF, scans, handwritten)</a:t>
+            </a:r>
+          </a:p>
+          <a:p>
+            <a:r>
+              <a:rPr dirty="0"/>
+              <a:t>Manual classification into SAP/</a:t>
+            </a:r>
+            <a:r>
+              <a:rPr dirty="0" err="1"/>
+              <a:t>ContrAct</a:t>
+            </a:r>
+            <a:endParaRPr dirty="0"/>
+          </a:p>
+          <a:p>
+            <a:r>
+              <a:rPr dirty="0"/>
               <a:t>4-level taxonomy × 3 languages (DE/FR/IT)</a:t>
             </a:r>
           </a:p>
           <a:p>
             <a:r>
+              <a:rPr dirty="0"/>
               <a:t>13 fields per contract + cost sharing + dependencies</a:t>
             </a:r>
           </a:p>
           <a:p>
             <a:r>
+              <a:rPr dirty="0"/>
               <a:t>Error-prone: humans make mistakes under volume</a:t>
             </a:r>
           </a:p>
-          <a:p/>
-          <a:p>
-            <a:r>
+          <a:p>
+            <a:endParaRPr dirty="0"/>
+          </a:p>
+          <a:p>
+            <a:r>
+              <a:rPr dirty="0"/>
               <a:t>→ "Here are 5 contracts. Sort them by this schema."</a:t>
             </a:r>
           </a:p>
@@ -3579,7 +3774,7 @@
 </file>
 
 <file path=ppt/slides/slide3.xml><?xml version="1.0" encoding="utf-8"?>
-<p:sld xmlns:a="http://schemas.openxmlformats.org/drawingml/2006/main" xmlns:p="http://schemas.openxmlformats.org/presentationml/2006/main" xmlns:r="http://schemas.openxmlformats.org/officeDocument/2006/relationships">
+<p:sld xmlns:a="http://schemas.openxmlformats.org/drawingml/2006/main" xmlns:r="http://schemas.openxmlformats.org/officeDocument/2006/relationships" xmlns:p="http://schemas.openxmlformats.org/presentationml/2006/main" show="0">
   <p:cSld>
     <p:spTree>
       <p:nvGrpSpPr>
@@ -3587,7 +3782,14 @@
         <p:cNvGrpSpPr/>
         <p:nvPr/>
       </p:nvGrpSpPr>
-      <p:grpSpPr/>
+      <p:grpSpPr>
+        <a:xfrm>
+          <a:off x="0" y="0"/>
+          <a:ext cx="0" cy="0"/>
+          <a:chOff x="0" y="0"/>
+          <a:chExt cx="0" cy="0"/>
+        </a:xfrm>
+      </p:grpSpPr>
       <p:sp>
         <p:nvSpPr>
           <p:cNvPr id="2" name="Title 1"/>
@@ -3604,6 +3806,7 @@
           <a:lstStyle/>
           <a:p>
             <a:r>
+              <a:rPr dirty="0"/>
               <a:t>Today: Manual Extraction</a:t>
             </a:r>
           </a:p>
@@ -3625,28 +3828,63 @@
           <a:lstStyle/>
           <a:p>
             <a:r>
+              <a:rPr dirty="0"/>
               <a:t>Humans read PDFs and fill a spreadsheet (33 columns)</a:t>
             </a:r>
           </a:p>
           <a:p>
             <a:r>
-              <a:t>Masterdatei H4R.xlsx – manually maintained</a:t>
-            </a:r>
-          </a:p>
-          <a:p>
-            <a:r>
+              <a:rPr dirty="0" err="1"/>
+              <a:t>Masterdatei</a:t>
+            </a:r>
+            <a:r>
+              <a:rPr dirty="0"/>
+              <a:t> H4R.xlsx – manually maintained</a:t>
+            </a:r>
+          </a:p>
+          <a:p>
+            <a:r>
+              <a:rPr dirty="0"/>
               <a:t>Slow, expensive, error-prone</a:t>
             </a:r>
           </a:p>
           <a:p>
             <a:r>
+              <a:rPr dirty="0"/>
               <a:t>Some contracts from 1926 – handwritten fields</a:t>
             </a:r>
           </a:p>
-          <a:p/>
-          <a:p>
-            <a:r>
-              <a:t>🕐 5,000 contracts × 30 min = 2,500 hours = 1.5 FTE/year</a:t>
+          <a:p>
+            <a:endParaRPr dirty="0"/>
+          </a:p>
+          <a:p>
+            <a:r>
+              <a:rPr dirty="0"/>
+              <a:t>🕐 </a:t>
+            </a:r>
+            <a:r>
+              <a:rPr lang="de-CH" dirty="0"/>
+              <a:t>10’</a:t>
+            </a:r>
+            <a:r>
+              <a:rPr dirty="0"/>
+              <a:t>000 contracts × 30 min = </a:t>
+            </a:r>
+            <a:r>
+              <a:rPr lang="de-CH" dirty="0"/>
+              <a:t>5’0</a:t>
+            </a:r>
+            <a:r>
+              <a:rPr dirty="0"/>
+              <a:t>00 hours = </a:t>
+            </a:r>
+            <a:r>
+              <a:rPr lang="de-CH" dirty="0"/>
+              <a:t>3</a:t>
+            </a:r>
+            <a:r>
+              <a:rPr dirty="0"/>
+              <a:t> FTE/year</a:t>
             </a:r>
           </a:p>
         </p:txBody>
@@ -3660,18 +3898,37 @@
 </file>
 
 <file path=ppt/slides/slide4.xml><?xml version="1.0" encoding="utf-8"?>
-<p:sld xmlns:a="http://schemas.openxmlformats.org/drawingml/2006/main" xmlns:p="http://schemas.openxmlformats.org/presentationml/2006/main" xmlns:r="http://schemas.openxmlformats.org/officeDocument/2006/relationships">
+<p:sld xmlns:a="http://schemas.openxmlformats.org/drawingml/2006/main" xmlns:r="http://schemas.openxmlformats.org/officeDocument/2006/relationships" xmlns:p="http://schemas.openxmlformats.org/presentationml/2006/main">
   <p:cSld>
     <p:spTree>
       <p:nvGrpSpPr>
-        <p:cNvPr id="1" name=""/>
+        <p:cNvPr id="1" name="">
+          <a:extLst>
+            <a:ext uri="{FF2B5EF4-FFF2-40B4-BE49-F238E27FC236}">
+              <a16:creationId xmlns:a16="http://schemas.microsoft.com/office/drawing/2014/main" id="{6E36AF53-93C8-67B6-105D-38D563D2C5A0}"/>
+            </a:ext>
+          </a:extLst>
+        </p:cNvPr>
         <p:cNvGrpSpPr/>
         <p:nvPr/>
       </p:nvGrpSpPr>
-      <p:grpSpPr/>
-      <p:sp>
-        <p:nvSpPr>
-          <p:cNvPr id="2" name="Title 1"/>
+      <p:grpSpPr>
+        <a:xfrm>
+          <a:off x="0" y="0"/>
+          <a:ext cx="0" cy="0"/>
+          <a:chOff x="0" y="0"/>
+          <a:chExt cx="0" cy="0"/>
+        </a:xfrm>
+      </p:grpSpPr>
+      <p:sp>
+        <p:nvSpPr>
+          <p:cNvPr id="2" name="Title 1">
+            <a:extLst>
+              <a:ext uri="{FF2B5EF4-FFF2-40B4-BE49-F238E27FC236}">
+                <a16:creationId xmlns:a16="http://schemas.microsoft.com/office/drawing/2014/main" id="{AD253E54-236B-38C2-F09B-ACC3EC53D7A5}"/>
+              </a:ext>
+            </a:extLst>
+          </p:cNvPr>
           <p:cNvSpPr>
             <a:spLocks noGrp="1"/>
           </p:cNvSpPr>
@@ -3684,71 +3941,363 @@
           <a:bodyPr/>
           <a:lstStyle/>
           <a:p>
-            <a:r>
-              <a:t>Our Solution: Taxonomy + LLM Pipeline</a:t>
-            </a:r>
-          </a:p>
-        </p:txBody>
-      </p:sp>
-      <p:sp>
-        <p:nvSpPr>
-          <p:cNvPr id="3" name="Content Placeholder 2"/>
-          <p:cNvSpPr>
-            <a:spLocks noGrp="1"/>
-          </p:cNvSpPr>
-          <p:nvPr>
-            <p:ph idx="1"/>
-          </p:nvPr>
-        </p:nvSpPr>
-        <p:spPr/>
-        <p:txBody>
-          <a:bodyPr/>
-          <a:lstStyle/>
-          <a:p>
-            <a:r>
-              <a:t>Step 1: taxonomy.yaml</a:t>
-            </a:r>
-          </a:p>
-          <a:p>
-            <a:r>
-              <a:t>  → Contract types as machine-readable schema</a:t>
-            </a:r>
-          </a:p>
-          <a:p>
-            <a:r>
-              <a:t>  → 3 disjoint building-block pools</a:t>
-            </a:r>
-          </a:p>
-          <a:p/>
-          <a:p>
-            <a:r>
-              <a:t>Step 2: Extraction Pipeline</a:t>
-            </a:r>
-          </a:p>
-          <a:p>
-            <a:r>
-              <a:t>  PDF → markitdown → LLM + System Prompt → JSON</a:t>
-            </a:r>
-          </a:p>
-          <a:p/>
-          <a:p>
-            <a:r>
-              <a:t>Step 3: Validation</a:t>
-            </a:r>
-          </a:p>
-          <a:p>
-            <a:r>
-              <a:t>  → Quality indicator + source reference per field</a:t>
-            </a:r>
-          </a:p>
-          <a:p>
-            <a:r>
-              <a:t>  → Only allowed taxonomy combinations pass</a:t>
-            </a:r>
-          </a:p>
-        </p:txBody>
-      </p:sp>
+            <a:pPr algn="ctr"/>
+            <a:r>
+              <a:rPr lang="de-CH" dirty="0"/>
+              <a:t>/</a:t>
+            </a:r>
+            <a:r>
+              <a:rPr dirty="0"/>
+              <a:t>The Problem</a:t>
+            </a:r>
+            <a:r>
+              <a:rPr lang="de-CH" dirty="0"/>
+              <a:t>/</a:t>
+            </a:r>
+            <a:endParaRPr dirty="0"/>
+          </a:p>
+        </p:txBody>
+      </p:sp>
+      <p:pic>
+        <p:nvPicPr>
+          <p:cNvPr id="7" name="Grafik 6">
+            <a:extLst>
+              <a:ext uri="{FF2B5EF4-FFF2-40B4-BE49-F238E27FC236}">
+                <a16:creationId xmlns:a16="http://schemas.microsoft.com/office/drawing/2014/main" id="{BFEF7DE2-80F3-F33C-18E4-61FAD4EF1470}"/>
+              </a:ext>
+            </a:extLst>
+          </p:cNvPr>
+          <p:cNvPicPr>
+            <a:picLocks noChangeAspect="1"/>
+          </p:cNvPicPr>
+          <p:nvPr/>
+        </p:nvPicPr>
+        <p:blipFill>
+          <a:blip r:embed="rId2">
+            <a:extLst>
+              <a:ext uri="{28A0092B-C50C-407E-A947-70E740481C1C}">
+                <a14:useLocalDpi xmlns:a14="http://schemas.microsoft.com/office/drawing/2010/main" val="0"/>
+              </a:ext>
+            </a:extLst>
+          </a:blip>
+          <a:stretch>
+            <a:fillRect/>
+          </a:stretch>
+        </p:blipFill>
+        <p:spPr>
+          <a:xfrm>
+            <a:off x="838200" y="2209800"/>
+            <a:ext cx="2438400" cy="2438400"/>
+          </a:xfrm>
+          <a:prstGeom prst="rect">
+            <a:avLst/>
+          </a:prstGeom>
+        </p:spPr>
+      </p:pic>
+      <p:sp>
+        <p:nvSpPr>
+          <p:cNvPr id="8" name="Textfeld 7">
+            <a:extLst>
+              <a:ext uri="{FF2B5EF4-FFF2-40B4-BE49-F238E27FC236}">
+                <a16:creationId xmlns:a16="http://schemas.microsoft.com/office/drawing/2014/main" id="{D7E92340-644D-E54D-D100-7E17F77FC323}"/>
+              </a:ext>
+            </a:extLst>
+          </p:cNvPr>
+          <p:cNvSpPr txBox="1"/>
+          <p:nvPr/>
+        </p:nvSpPr>
+        <p:spPr>
+          <a:xfrm>
+            <a:off x="838200" y="5168348"/>
+            <a:ext cx="2438400" cy="646331"/>
+          </a:xfrm>
+          <a:prstGeom prst="rect">
+            <a:avLst/>
+          </a:prstGeom>
+          <a:noFill/>
+        </p:spPr>
+        <p:txBody>
+          <a:bodyPr wrap="square" rtlCol="0">
+            <a:spAutoFit/>
+          </a:bodyPr>
+          <a:lstStyle/>
+          <a:p>
+            <a:pPr algn="ctr"/>
+            <a:r>
+              <a:rPr lang="de-CH" dirty="0"/>
+              <a:t>10’000+ </a:t>
+            </a:r>
+            <a:r>
+              <a:rPr lang="de-CH" dirty="0" err="1"/>
+              <a:t>infrastructure</a:t>
+            </a:r>
+            <a:r>
+              <a:rPr lang="de-CH" dirty="0"/>
+              <a:t> </a:t>
+            </a:r>
+            <a:r>
+              <a:rPr lang="de-CH" dirty="0" err="1"/>
+              <a:t>contracts</a:t>
+            </a:r>
+            <a:endParaRPr lang="de-DE" dirty="0"/>
+          </a:p>
+        </p:txBody>
+      </p:sp>
+      <p:pic>
+        <p:nvPicPr>
+          <p:cNvPr id="10" name="Grafik 9">
+            <a:extLst>
+              <a:ext uri="{FF2B5EF4-FFF2-40B4-BE49-F238E27FC236}">
+                <a16:creationId xmlns:a16="http://schemas.microsoft.com/office/drawing/2014/main" id="{55F6BAF1-DD40-642D-3DEB-714020B5CEE7}"/>
+              </a:ext>
+            </a:extLst>
+          </p:cNvPr>
+          <p:cNvPicPr>
+            <a:picLocks noChangeAspect="1"/>
+          </p:cNvPicPr>
+          <p:nvPr/>
+        </p:nvPicPr>
+        <p:blipFill>
+          <a:blip r:embed="rId3">
+            <a:extLst>
+              <a:ext uri="{28A0092B-C50C-407E-A947-70E740481C1C}">
+                <a14:useLocalDpi xmlns:a14="http://schemas.microsoft.com/office/drawing/2010/main" val="0"/>
+              </a:ext>
+            </a:extLst>
+          </a:blip>
+          <a:stretch>
+            <a:fillRect/>
+          </a:stretch>
+        </p:blipFill>
+        <p:spPr>
+          <a:xfrm>
+            <a:off x="4244008" y="1867418"/>
+            <a:ext cx="3124200" cy="3124200"/>
+          </a:xfrm>
+          <a:prstGeom prst="rect">
+            <a:avLst/>
+          </a:prstGeom>
+        </p:spPr>
+      </p:pic>
+      <p:pic>
+        <p:nvPicPr>
+          <p:cNvPr id="12" name="Grafik 11">
+            <a:extLst>
+              <a:ext uri="{FF2B5EF4-FFF2-40B4-BE49-F238E27FC236}">
+                <a16:creationId xmlns:a16="http://schemas.microsoft.com/office/drawing/2014/main" id="{FCF71295-823F-5569-CE13-4BAFDEEEDF67}"/>
+              </a:ext>
+            </a:extLst>
+          </p:cNvPr>
+          <p:cNvPicPr>
+            <a:picLocks noChangeAspect="1"/>
+          </p:cNvPicPr>
+          <p:nvPr/>
+        </p:nvPicPr>
+        <p:blipFill>
+          <a:blip r:embed="rId4">
+            <a:extLst>
+              <a:ext uri="{28A0092B-C50C-407E-A947-70E740481C1C}">
+                <a14:useLocalDpi xmlns:a14="http://schemas.microsoft.com/office/drawing/2010/main" val="0"/>
+              </a:ext>
+            </a:extLst>
+          </a:blip>
+          <a:stretch>
+            <a:fillRect/>
+          </a:stretch>
+        </p:blipFill>
+        <p:spPr>
+          <a:xfrm>
+            <a:off x="5618479" y="3099794"/>
+            <a:ext cx="658411" cy="658411"/>
+          </a:xfrm>
+          <a:prstGeom prst="rect">
+            <a:avLst/>
+          </a:prstGeom>
+        </p:spPr>
+      </p:pic>
+      <p:sp>
+        <p:nvSpPr>
+          <p:cNvPr id="13" name="Textfeld 12">
+            <a:extLst>
+              <a:ext uri="{FF2B5EF4-FFF2-40B4-BE49-F238E27FC236}">
+                <a16:creationId xmlns:a16="http://schemas.microsoft.com/office/drawing/2014/main" id="{2DE0466A-C88B-2CB4-E1D7-5DFAD7863ACB}"/>
+              </a:ext>
+            </a:extLst>
+          </p:cNvPr>
+          <p:cNvSpPr txBox="1"/>
+          <p:nvPr/>
+        </p:nvSpPr>
+        <p:spPr>
+          <a:xfrm>
+            <a:off x="4244008" y="5168348"/>
+            <a:ext cx="2438400" cy="646331"/>
+          </a:xfrm>
+          <a:prstGeom prst="rect">
+            <a:avLst/>
+          </a:prstGeom>
+          <a:noFill/>
+        </p:spPr>
+        <p:txBody>
+          <a:bodyPr wrap="square" rtlCol="0">
+            <a:spAutoFit/>
+          </a:bodyPr>
+          <a:lstStyle/>
+          <a:p>
+            <a:pPr algn="ctr"/>
+            <a:r>
+              <a:rPr lang="de-CH" dirty="0"/>
+              <a:t>Manuel </a:t>
+            </a:r>
+            <a:r>
+              <a:rPr lang="de-CH" dirty="0" err="1"/>
+              <a:t>work</a:t>
+            </a:r>
+            <a:r>
+              <a:rPr lang="de-CH" dirty="0"/>
+              <a:t>, slow &amp;</a:t>
+            </a:r>
+          </a:p>
+          <a:p>
+            <a:pPr algn="ctr"/>
+            <a:r>
+              <a:rPr lang="de-CH" dirty="0"/>
+              <a:t>expensive</a:t>
+            </a:r>
+            <a:endParaRPr lang="de-DE" dirty="0"/>
+          </a:p>
+        </p:txBody>
+      </p:sp>
+      <p:sp>
+        <p:nvSpPr>
+          <p:cNvPr id="15" name="Textfeld 14">
+            <a:extLst>
+              <a:ext uri="{FF2B5EF4-FFF2-40B4-BE49-F238E27FC236}">
+                <a16:creationId xmlns:a16="http://schemas.microsoft.com/office/drawing/2014/main" id="{BB2119DD-EDAB-4AD0-66AD-ECD350241F36}"/>
+              </a:ext>
+            </a:extLst>
+          </p:cNvPr>
+          <p:cNvSpPr txBox="1"/>
+          <p:nvPr/>
+        </p:nvSpPr>
+        <p:spPr>
+          <a:xfrm>
+            <a:off x="8335616" y="5167830"/>
+            <a:ext cx="2438400" cy="646331"/>
+          </a:xfrm>
+          <a:prstGeom prst="rect">
+            <a:avLst/>
+          </a:prstGeom>
+          <a:noFill/>
+        </p:spPr>
+        <p:txBody>
+          <a:bodyPr wrap="square" rtlCol="0">
+            <a:spAutoFit/>
+          </a:bodyPr>
+          <a:lstStyle/>
+          <a:p>
+            <a:pPr algn="ctr"/>
+            <a:r>
+              <a:rPr lang="de-DE" dirty="0" err="1"/>
+              <a:t>contracts</a:t>
+            </a:r>
+            <a:r>
+              <a:rPr lang="de-DE" dirty="0"/>
+              <a:t> </a:t>
+            </a:r>
+            <a:r>
+              <a:rPr lang="de-DE" dirty="0" err="1"/>
+              <a:t>from</a:t>
+            </a:r>
+            <a:r>
+              <a:rPr lang="de-DE" dirty="0"/>
+              <a:t> 1926  </a:t>
+            </a:r>
+            <a:r>
+              <a:rPr lang="de-DE" dirty="0" err="1"/>
+              <a:t>handwritten</a:t>
+            </a:r>
+            <a:endParaRPr lang="de-DE" dirty="0"/>
+          </a:p>
+        </p:txBody>
+      </p:sp>
+      <p:pic>
+        <p:nvPicPr>
+          <p:cNvPr id="19" name="Grafik 18">
+            <a:extLst>
+              <a:ext uri="{FF2B5EF4-FFF2-40B4-BE49-F238E27FC236}">
+                <a16:creationId xmlns:a16="http://schemas.microsoft.com/office/drawing/2014/main" id="{11327CB7-8B3B-C9E7-654D-219C9F4FE998}"/>
+              </a:ext>
+            </a:extLst>
+          </p:cNvPr>
+          <p:cNvPicPr>
+            <a:picLocks noChangeAspect="1"/>
+          </p:cNvPicPr>
+          <p:nvPr/>
+        </p:nvPicPr>
+        <p:blipFill>
+          <a:blip r:embed="rId5">
+            <a:extLst>
+              <a:ext uri="{28A0092B-C50C-407E-A947-70E740481C1C}">
+                <a14:useLocalDpi xmlns:a14="http://schemas.microsoft.com/office/drawing/2010/main" val="0"/>
+              </a:ext>
+            </a:extLst>
+          </a:blip>
+          <a:stretch>
+            <a:fillRect/>
+          </a:stretch>
+        </p:blipFill>
+        <p:spPr>
+          <a:xfrm>
+            <a:off x="8156490" y="2286234"/>
+            <a:ext cx="2617526" cy="2617526"/>
+          </a:xfrm>
+          <a:prstGeom prst="rect">
+            <a:avLst/>
+          </a:prstGeom>
+        </p:spPr>
+      </p:pic>
+      <p:pic>
+        <p:nvPicPr>
+          <p:cNvPr id="21" name="Grafik 20">
+            <a:extLst>
+              <a:ext uri="{FF2B5EF4-FFF2-40B4-BE49-F238E27FC236}">
+                <a16:creationId xmlns:a16="http://schemas.microsoft.com/office/drawing/2014/main" id="{14429CA5-D175-8511-54F2-7B9AC4850F92}"/>
+              </a:ext>
+            </a:extLst>
+          </p:cNvPr>
+          <p:cNvPicPr>
+            <a:picLocks noChangeAspect="1"/>
+          </p:cNvPicPr>
+          <p:nvPr/>
+        </p:nvPicPr>
+        <p:blipFill>
+          <a:blip r:embed="rId6">
+            <a:extLst>
+              <a:ext uri="{28A0092B-C50C-407E-A947-70E740481C1C}">
+                <a14:useLocalDpi xmlns:a14="http://schemas.microsoft.com/office/drawing/2010/main" val="0"/>
+              </a:ext>
+            </a:extLst>
+          </a:blip>
+          <a:stretch>
+            <a:fillRect/>
+          </a:stretch>
+        </p:blipFill>
+        <p:spPr>
+          <a:xfrm>
+            <a:off x="6341825" y="3428999"/>
+            <a:ext cx="658411" cy="658411"/>
+          </a:xfrm>
+          <a:prstGeom prst="rect">
+            <a:avLst/>
+          </a:prstGeom>
+        </p:spPr>
+      </p:pic>
     </p:spTree>
+    <p:extLst>
+      <p:ext uri="{BB962C8B-B14F-4D97-AF65-F5344CB8AC3E}">
+        <p14:creationId xmlns:p14="http://schemas.microsoft.com/office/powerpoint/2010/main" val="3840876009"/>
+      </p:ext>
+    </p:extLst>
   </p:cSld>
   <p:clrMapOvr>
     <a:masterClrMapping/>
@@ -3757,7 +4306,7 @@
 </file>
 
 <file path=ppt/slides/slide5.xml><?xml version="1.0" encoding="utf-8"?>
-<p:sld xmlns:a="http://schemas.openxmlformats.org/drawingml/2006/main" xmlns:p="http://schemas.openxmlformats.org/presentationml/2006/main" xmlns:r="http://schemas.openxmlformats.org/officeDocument/2006/relationships">
+<p:sld xmlns:a="http://schemas.openxmlformats.org/drawingml/2006/main" xmlns:r="http://schemas.openxmlformats.org/officeDocument/2006/relationships" xmlns:p="http://schemas.openxmlformats.org/presentationml/2006/main">
   <p:cSld>
     <p:spTree>
       <p:nvGrpSpPr>
@@ -3765,10 +4314,23 @@
         <p:cNvGrpSpPr/>
         <p:nvPr/>
       </p:nvGrpSpPr>
-      <p:grpSpPr/>
-      <p:sp>
-        <p:nvSpPr>
-          <p:cNvPr id="2" name="Title 1"/>
+      <p:grpSpPr>
+        <a:xfrm>
+          <a:off x="0" y="0"/>
+          <a:ext cx="0" cy="0"/>
+          <a:chOff x="0" y="0"/>
+          <a:chExt cx="0" cy="0"/>
+        </a:xfrm>
+      </p:grpSpPr>
+      <p:sp>
+        <p:nvSpPr>
+          <p:cNvPr id="2" name="Titel 1">
+            <a:extLst>
+              <a:ext uri="{FF2B5EF4-FFF2-40B4-BE49-F238E27FC236}">
+                <a16:creationId xmlns:a16="http://schemas.microsoft.com/office/drawing/2014/main" id="{F70EE9C7-06D3-2546-656A-6CC33CD9B59B}"/>
+              </a:ext>
+            </a:extLst>
+          </p:cNvPr>
           <p:cNvSpPr>
             <a:spLocks noGrp="1"/>
           </p:cNvSpPr>
@@ -3776,75 +4338,526 @@
             <p:ph type="title"/>
           </p:nvPr>
         </p:nvSpPr>
-        <p:spPr/>
-        <p:txBody>
-          <a:bodyPr/>
-          <a:lstStyle/>
-          <a:p>
-            <a:r>
-              <a:t>Contract Taxonomy (4 Levels)</a:t>
-            </a:r>
-          </a:p>
-        </p:txBody>
-      </p:sp>
-      <p:sp>
-        <p:nvSpPr>
-          <p:cNvPr id="3" name="Content Placeholder 2"/>
-          <p:cNvSpPr>
-            <a:spLocks noGrp="1"/>
-          </p:cNvSpPr>
-          <p:nvPr>
-            <p:ph idx="1"/>
-          </p:nvPr>
-        </p:nvSpPr>
-        <p:spPr/>
-        <p:txBody>
-          <a:bodyPr/>
-          <a:lstStyle/>
-          <a:p>
-            <a:r>
-              <a:t>Ebene 1: Infrastrukturverträge</a:t>
-            </a:r>
-          </a:p>
-          <a:p>
-            <a:r>
-              <a:t>├─ Ebene 2: Zusammenarbeit bei Anlagen</a:t>
-            </a:r>
-          </a:p>
-          <a:p>
-            <a:r>
-              <a:t>│  └─ Ebene 3: Phases (V1–V4)</a:t>
-            </a:r>
-          </a:p>
-          <a:p>
-            <a:r>
-              <a:t>│     └─ Ebene 4: Pool A (9 building blocks)</a:t>
-            </a:r>
-          </a:p>
-          <a:p>
-            <a:r>
-              <a:t>└─ Ebene 2: Grundstücknutzung</a:t>
-            </a:r>
-          </a:p>
-          <a:p>
-            <a:r>
-              <a:t>   ├─ Ebene 3: Nutzungsverträge → Pool B (4)</a:t>
-            </a:r>
-          </a:p>
-          <a:p>
-            <a:r>
-              <a:t>   └─ Ebene 3: Bauten Dritter → Pool C (2)</a:t>
-            </a:r>
-          </a:p>
-          <a:p/>
-          <a:p>
-            <a:r>
-              <a:t>3 disjoint pools – validated combinations only</a:t>
-            </a:r>
-          </a:p>
-        </p:txBody>
-      </p:sp>
+        <p:spPr>
+          <a:xfrm>
+            <a:off x="838200" y="365125"/>
+            <a:ext cx="10515600" cy="691515"/>
+          </a:xfrm>
+        </p:spPr>
+        <p:txBody>
+          <a:bodyPr>
+            <a:normAutofit fontScale="90000"/>
+          </a:bodyPr>
+          <a:lstStyle/>
+          <a:p>
+            <a:pPr algn="ctr"/>
+            <a:r>
+              <a:rPr lang="de-CH" dirty="0"/>
+              <a:t>/</a:t>
+            </a:r>
+            <a:r>
+              <a:rPr lang="de-CH" dirty="0" err="1"/>
+              <a:t>Our</a:t>
+            </a:r>
+            <a:r>
+              <a:rPr lang="de-CH" dirty="0"/>
+              <a:t> Solution/</a:t>
+            </a:r>
+            <a:br>
+              <a:rPr lang="de-CH" dirty="0"/>
+            </a:br>
+            <a:r>
+              <a:rPr lang="de-CH" sz="2700" dirty="0" err="1"/>
+              <a:t>Taxonomy</a:t>
+            </a:r>
+            <a:r>
+              <a:rPr lang="de-CH" sz="2700" dirty="0"/>
+              <a:t> + LLM Pipeline</a:t>
+            </a:r>
+            <a:endParaRPr lang="de-DE" dirty="0"/>
+          </a:p>
+        </p:txBody>
+      </p:sp>
+      <p:pic>
+        <p:nvPicPr>
+          <p:cNvPr id="5" name="Grafik 4">
+            <a:extLst>
+              <a:ext uri="{FF2B5EF4-FFF2-40B4-BE49-F238E27FC236}">
+                <a16:creationId xmlns:a16="http://schemas.microsoft.com/office/drawing/2014/main" id="{365F3974-A75A-A222-B11E-253AED8EBA1C}"/>
+              </a:ext>
+            </a:extLst>
+          </p:cNvPr>
+          <p:cNvPicPr>
+            <a:picLocks noChangeAspect="1"/>
+          </p:cNvPicPr>
+          <p:nvPr/>
+        </p:nvPicPr>
+        <p:blipFill>
+          <a:blip r:embed="rId2">
+            <a:extLst>
+              <a:ext uri="{28A0092B-C50C-407E-A947-70E740481C1C}">
+                <a14:useLocalDpi xmlns:a14="http://schemas.microsoft.com/office/drawing/2010/main" val="0"/>
+              </a:ext>
+            </a:extLst>
+          </a:blip>
+          <a:stretch>
+            <a:fillRect/>
+          </a:stretch>
+        </p:blipFill>
+        <p:spPr>
+          <a:xfrm>
+            <a:off x="680720" y="3949368"/>
+            <a:ext cx="3564835" cy="3564835"/>
+          </a:xfrm>
+          <a:prstGeom prst="rect">
+            <a:avLst/>
+          </a:prstGeom>
+        </p:spPr>
+      </p:pic>
+      <p:pic>
+        <p:nvPicPr>
+          <p:cNvPr id="6" name="Grafik 5">
+            <a:extLst>
+              <a:ext uri="{FF2B5EF4-FFF2-40B4-BE49-F238E27FC236}">
+                <a16:creationId xmlns:a16="http://schemas.microsoft.com/office/drawing/2014/main" id="{338E623D-D117-C85A-AB3B-11E5922A7ECB}"/>
+              </a:ext>
+            </a:extLst>
+          </p:cNvPr>
+          <p:cNvPicPr>
+            <a:picLocks noChangeAspect="1"/>
+          </p:cNvPicPr>
+          <p:nvPr/>
+        </p:nvPicPr>
+        <p:blipFill>
+          <a:blip r:embed="rId2">
+            <a:extLst>
+              <a:ext uri="{28A0092B-C50C-407E-A947-70E740481C1C}">
+                <a14:useLocalDpi xmlns:a14="http://schemas.microsoft.com/office/drawing/2010/main" val="0"/>
+              </a:ext>
+            </a:extLst>
+          </a:blip>
+          <a:stretch>
+            <a:fillRect/>
+          </a:stretch>
+        </p:blipFill>
+        <p:spPr>
+          <a:xfrm>
+            <a:off x="4119659" y="3949367"/>
+            <a:ext cx="3564835" cy="3564835"/>
+          </a:xfrm>
+          <a:prstGeom prst="rect">
+            <a:avLst/>
+          </a:prstGeom>
+        </p:spPr>
+      </p:pic>
+      <p:pic>
+        <p:nvPicPr>
+          <p:cNvPr id="7" name="Grafik 6">
+            <a:extLst>
+              <a:ext uri="{FF2B5EF4-FFF2-40B4-BE49-F238E27FC236}">
+                <a16:creationId xmlns:a16="http://schemas.microsoft.com/office/drawing/2014/main" id="{127C22C4-4DA4-AC17-3B65-8F5DB3F86FB0}"/>
+              </a:ext>
+            </a:extLst>
+          </p:cNvPr>
+          <p:cNvPicPr>
+            <a:picLocks noChangeAspect="1"/>
+          </p:cNvPicPr>
+          <p:nvPr/>
+        </p:nvPicPr>
+        <p:blipFill>
+          <a:blip r:embed="rId2">
+            <a:extLst>
+              <a:ext uri="{28A0092B-C50C-407E-A947-70E740481C1C}">
+                <a14:useLocalDpi xmlns:a14="http://schemas.microsoft.com/office/drawing/2010/main" val="0"/>
+              </a:ext>
+            </a:extLst>
+          </a:blip>
+          <a:stretch>
+            <a:fillRect/>
+          </a:stretch>
+        </p:blipFill>
+        <p:spPr>
+          <a:xfrm>
+            <a:off x="7558598" y="3949366"/>
+            <a:ext cx="3564835" cy="3564835"/>
+          </a:xfrm>
+          <a:prstGeom prst="rect">
+            <a:avLst/>
+          </a:prstGeom>
+        </p:spPr>
+      </p:pic>
+      <p:sp>
+        <p:nvSpPr>
+          <p:cNvPr id="9" name="Textfeld 8">
+            <a:extLst>
+              <a:ext uri="{FF2B5EF4-FFF2-40B4-BE49-F238E27FC236}">
+                <a16:creationId xmlns:a16="http://schemas.microsoft.com/office/drawing/2014/main" id="{DDB1050C-9B27-D10A-FAEF-4A82202C03BF}"/>
+              </a:ext>
+            </a:extLst>
+          </p:cNvPr>
+          <p:cNvSpPr txBox="1"/>
+          <p:nvPr/>
+        </p:nvSpPr>
+        <p:spPr>
+          <a:xfrm>
+            <a:off x="981987" y="1918041"/>
+            <a:ext cx="2836407" cy="2308324"/>
+          </a:xfrm>
+          <a:prstGeom prst="rect">
+            <a:avLst/>
+          </a:prstGeom>
+          <a:noFill/>
+        </p:spPr>
+        <p:txBody>
+          <a:bodyPr wrap="square">
+            <a:spAutoFit/>
+          </a:bodyPr>
+          <a:lstStyle/>
+          <a:p>
+            <a:r>
+              <a:rPr lang="de-CH" u="sng" dirty="0" err="1"/>
+              <a:t>Step</a:t>
+            </a:r>
+            <a:r>
+              <a:rPr lang="de-CH" u="sng" dirty="0"/>
+              <a:t> 1</a:t>
+            </a:r>
+            <a:r>
+              <a:rPr lang="de-CH" dirty="0"/>
+              <a:t> Create </a:t>
+            </a:r>
+            <a:r>
+              <a:rPr lang="de-CH" dirty="0" err="1"/>
+              <a:t>Taxonomy</a:t>
+            </a:r>
+            <a:endParaRPr lang="de-CH" dirty="0"/>
+          </a:p>
+          <a:p>
+            <a:endParaRPr lang="de-CH" dirty="0"/>
+          </a:p>
+          <a:p>
+            <a:r>
+              <a:rPr lang="de-CH" dirty="0" err="1"/>
+              <a:t>taxonomy.yaml</a:t>
+            </a:r>
+            <a:endParaRPr lang="de-CH" dirty="0"/>
+          </a:p>
+          <a:p>
+            <a:r>
+              <a:rPr lang="de-CH" dirty="0"/>
+              <a:t>  → </a:t>
+            </a:r>
+            <a:r>
+              <a:rPr lang="de-CH" dirty="0" err="1"/>
+              <a:t>Contract</a:t>
+            </a:r>
+            <a:r>
+              <a:rPr lang="de-CH" dirty="0"/>
+              <a:t> </a:t>
+            </a:r>
+            <a:r>
+              <a:rPr lang="de-CH" dirty="0" err="1"/>
+              <a:t>types</a:t>
+            </a:r>
+            <a:r>
+              <a:rPr lang="de-CH" dirty="0"/>
+              <a:t> </a:t>
+            </a:r>
+            <a:r>
+              <a:rPr lang="de-CH" dirty="0" err="1"/>
+              <a:t>as</a:t>
+            </a:r>
+            <a:r>
+              <a:rPr lang="de-CH" dirty="0"/>
+              <a:t> </a:t>
+            </a:r>
+            <a:r>
+              <a:rPr lang="de-CH" dirty="0" err="1"/>
+              <a:t>machine-readable</a:t>
+            </a:r>
+            <a:r>
+              <a:rPr lang="de-CH" dirty="0"/>
+              <a:t> </a:t>
+            </a:r>
+            <a:r>
+              <a:rPr lang="de-CH" dirty="0" err="1"/>
+              <a:t>schema</a:t>
+            </a:r>
+            <a:endParaRPr lang="de-CH" dirty="0"/>
+          </a:p>
+          <a:p>
+            <a:r>
+              <a:rPr lang="de-CH" dirty="0"/>
+              <a:t>  → 3 </a:t>
+            </a:r>
+            <a:r>
+              <a:rPr lang="de-CH" dirty="0" err="1"/>
+              <a:t>disjoint</a:t>
+            </a:r>
+            <a:r>
+              <a:rPr lang="de-CH" dirty="0"/>
+              <a:t> building-block </a:t>
+            </a:r>
+            <a:r>
+              <a:rPr lang="de-CH" dirty="0" err="1"/>
+              <a:t>pools</a:t>
+            </a:r>
+            <a:endParaRPr lang="de-CH" dirty="0"/>
+          </a:p>
+        </p:txBody>
+      </p:sp>
+      <p:sp>
+        <p:nvSpPr>
+          <p:cNvPr id="12" name="Textfeld 11">
+            <a:extLst>
+              <a:ext uri="{FF2B5EF4-FFF2-40B4-BE49-F238E27FC236}">
+                <a16:creationId xmlns:a16="http://schemas.microsoft.com/office/drawing/2014/main" id="{B895815F-C9A8-F035-5288-7B7FF04DB54E}"/>
+              </a:ext>
+            </a:extLst>
+          </p:cNvPr>
+          <p:cNvSpPr txBox="1"/>
+          <p:nvPr/>
+        </p:nvSpPr>
+        <p:spPr>
+          <a:xfrm>
+            <a:off x="4483873" y="1918041"/>
+            <a:ext cx="2836407" cy="1477328"/>
+          </a:xfrm>
+          <a:prstGeom prst="rect">
+            <a:avLst/>
+          </a:prstGeom>
+          <a:noFill/>
+        </p:spPr>
+        <p:txBody>
+          <a:bodyPr wrap="square">
+            <a:spAutoFit/>
+          </a:bodyPr>
+          <a:lstStyle/>
+          <a:p>
+            <a:r>
+              <a:rPr lang="de-CH" u="sng" dirty="0" err="1"/>
+              <a:t>Step</a:t>
+            </a:r>
+            <a:r>
+              <a:rPr lang="de-CH" u="sng" dirty="0"/>
+              <a:t> 2</a:t>
+            </a:r>
+            <a:r>
+              <a:rPr lang="de-CH" dirty="0"/>
+              <a:t> </a:t>
+            </a:r>
+            <a:r>
+              <a:rPr lang="de-CH" dirty="0" err="1"/>
+              <a:t>Extraction</a:t>
+            </a:r>
+            <a:r>
+              <a:rPr lang="de-CH" dirty="0"/>
+              <a:t> Pipeline</a:t>
+            </a:r>
+          </a:p>
+          <a:p>
+            <a:endParaRPr lang="de-CH" dirty="0"/>
+          </a:p>
+          <a:p>
+            <a:endParaRPr lang="de-CH" dirty="0"/>
+          </a:p>
+          <a:p>
+            <a:r>
+              <a:rPr lang="de-CH" dirty="0"/>
+              <a:t>  PDF → </a:t>
+            </a:r>
+            <a:r>
+              <a:rPr lang="de-CH" dirty="0" err="1"/>
+              <a:t>markitdown</a:t>
+            </a:r>
+            <a:r>
+              <a:rPr lang="de-CH" dirty="0"/>
+              <a:t> → LLM + System Prompt → JSON</a:t>
+            </a:r>
+          </a:p>
+        </p:txBody>
+      </p:sp>
+      <p:sp>
+        <p:nvSpPr>
+          <p:cNvPr id="13" name="Textfeld 12">
+            <a:extLst>
+              <a:ext uri="{FF2B5EF4-FFF2-40B4-BE49-F238E27FC236}">
+                <a16:creationId xmlns:a16="http://schemas.microsoft.com/office/drawing/2014/main" id="{9307A0D1-A506-3AEB-9EA0-4D802F92D291}"/>
+              </a:ext>
+            </a:extLst>
+          </p:cNvPr>
+          <p:cNvSpPr txBox="1"/>
+          <p:nvPr/>
+        </p:nvSpPr>
+        <p:spPr>
+          <a:xfrm>
+            <a:off x="7985759" y="1918041"/>
+            <a:ext cx="2836407" cy="1754326"/>
+          </a:xfrm>
+          <a:prstGeom prst="rect">
+            <a:avLst/>
+          </a:prstGeom>
+          <a:noFill/>
+        </p:spPr>
+        <p:txBody>
+          <a:bodyPr wrap="square">
+            <a:spAutoFit/>
+          </a:bodyPr>
+          <a:lstStyle/>
+          <a:p>
+            <a:r>
+              <a:rPr lang="de-CH" u="sng" dirty="0" err="1"/>
+              <a:t>Step</a:t>
+            </a:r>
+            <a:r>
+              <a:rPr lang="de-CH" u="sng" dirty="0"/>
+              <a:t> 3</a:t>
+            </a:r>
+            <a:r>
+              <a:rPr lang="de-CH" dirty="0"/>
+              <a:t> Validation</a:t>
+            </a:r>
+          </a:p>
+          <a:p>
+            <a:endParaRPr lang="de-CH" dirty="0"/>
+          </a:p>
+          <a:p>
+            <a:r>
+              <a:rPr lang="de-CH" dirty="0"/>
+              <a:t>  → Quality </a:t>
+            </a:r>
+            <a:r>
+              <a:rPr lang="de-CH" dirty="0" err="1"/>
+              <a:t>indicator</a:t>
+            </a:r>
+            <a:r>
+              <a:rPr lang="de-CH" dirty="0"/>
+              <a:t> + source </a:t>
+            </a:r>
+            <a:r>
+              <a:rPr lang="de-CH" dirty="0" err="1"/>
+              <a:t>reference</a:t>
+            </a:r>
+            <a:r>
+              <a:rPr lang="de-CH" dirty="0"/>
+              <a:t> per </a:t>
+            </a:r>
+            <a:r>
+              <a:rPr lang="de-CH" dirty="0" err="1"/>
+              <a:t>field</a:t>
+            </a:r>
+            <a:endParaRPr lang="de-CH" dirty="0"/>
+          </a:p>
+          <a:p>
+            <a:r>
+              <a:rPr lang="de-CH" dirty="0"/>
+              <a:t>  → Only </a:t>
+            </a:r>
+            <a:r>
+              <a:rPr lang="de-CH" dirty="0" err="1"/>
+              <a:t>allowed</a:t>
+            </a:r>
+            <a:r>
+              <a:rPr lang="de-CH" dirty="0"/>
+              <a:t> </a:t>
+            </a:r>
+            <a:r>
+              <a:rPr lang="de-CH" dirty="0" err="1"/>
+              <a:t>taxonomy</a:t>
+            </a:r>
+            <a:r>
+              <a:rPr lang="de-CH" dirty="0"/>
+              <a:t> </a:t>
+            </a:r>
+            <a:r>
+              <a:rPr lang="de-CH" dirty="0" err="1"/>
+              <a:t>combinations</a:t>
+            </a:r>
+            <a:r>
+              <a:rPr lang="de-CH" dirty="0"/>
+              <a:t> pass</a:t>
+            </a:r>
+          </a:p>
+        </p:txBody>
+      </p:sp>
+      <p:pic>
+        <p:nvPicPr>
+          <p:cNvPr id="15" name="Grafik 14">
+            <a:extLst>
+              <a:ext uri="{FF2B5EF4-FFF2-40B4-BE49-F238E27FC236}">
+                <a16:creationId xmlns:a16="http://schemas.microsoft.com/office/drawing/2014/main" id="{0FB1307D-9700-4E94-F1A3-3488418818F1}"/>
+              </a:ext>
+            </a:extLst>
+          </p:cNvPr>
+          <p:cNvPicPr>
+            <a:picLocks noChangeAspect="1"/>
+          </p:cNvPicPr>
+          <p:nvPr/>
+        </p:nvPicPr>
+        <p:blipFill>
+          <a:blip r:embed="rId3">
+            <a:extLst>
+              <a:ext uri="{28A0092B-C50C-407E-A947-70E740481C1C}">
+                <a14:useLocalDpi xmlns:a14="http://schemas.microsoft.com/office/drawing/2010/main" val="0"/>
+              </a:ext>
+            </a:extLst>
+          </a:blip>
+          <a:stretch>
+            <a:fillRect/>
+          </a:stretch>
+        </p:blipFill>
+        <p:spPr>
+          <a:xfrm>
+            <a:off x="1810910" y="3949366"/>
+            <a:ext cx="1298050" cy="1298050"/>
+          </a:xfrm>
+          <a:prstGeom prst="rect">
+            <a:avLst/>
+          </a:prstGeom>
+        </p:spPr>
+      </p:pic>
+      <p:pic>
+        <p:nvPicPr>
+          <p:cNvPr id="17" name="Grafik 16">
+            <a:extLst>
+              <a:ext uri="{FF2B5EF4-FFF2-40B4-BE49-F238E27FC236}">
+                <a16:creationId xmlns:a16="http://schemas.microsoft.com/office/drawing/2014/main" id="{CB81319B-6CD2-56AE-1F3F-0FA25238DA11}"/>
+              </a:ext>
+            </a:extLst>
+          </p:cNvPr>
+          <p:cNvPicPr>
+            <a:picLocks noChangeAspect="1"/>
+          </p:cNvPicPr>
+          <p:nvPr/>
+        </p:nvPicPr>
+        <p:blipFill>
+          <a:blip r:embed="rId4">
+            <a:extLst>
+              <a:ext uri="{28A0092B-C50C-407E-A947-70E740481C1C}">
+                <a14:useLocalDpi xmlns:a14="http://schemas.microsoft.com/office/drawing/2010/main" val="0"/>
+              </a:ext>
+            </a:extLst>
+          </a:blip>
+          <a:stretch>
+            <a:fillRect/>
+          </a:stretch>
+        </p:blipFill>
+        <p:spPr>
+          <a:xfrm>
+            <a:off x="5344464" y="4108226"/>
+            <a:ext cx="1139190" cy="1139190"/>
+          </a:xfrm>
+          <a:prstGeom prst="rect">
+            <a:avLst/>
+          </a:prstGeom>
+        </p:spPr>
+      </p:pic>
     </p:spTree>
+    <p:extLst>
+      <p:ext uri="{BB962C8B-B14F-4D97-AF65-F5344CB8AC3E}">
+        <p14:creationId xmlns:p14="http://schemas.microsoft.com/office/powerpoint/2010/main" val="685521201"/>
+      </p:ext>
+    </p:extLst>
   </p:cSld>
   <p:clrMapOvr>
     <a:masterClrMapping/>
@@ -3853,7 +4866,7 @@
 </file>
 
 <file path=ppt/slides/slide6.xml><?xml version="1.0" encoding="utf-8"?>
-<p:sld xmlns:a="http://schemas.openxmlformats.org/drawingml/2006/main" xmlns:p="http://schemas.openxmlformats.org/presentationml/2006/main" xmlns:r="http://schemas.openxmlformats.org/officeDocument/2006/relationships">
+<p:sld xmlns:a="http://schemas.openxmlformats.org/drawingml/2006/main" xmlns:r="http://schemas.openxmlformats.org/officeDocument/2006/relationships" xmlns:p="http://schemas.openxmlformats.org/presentationml/2006/main" show="0">
   <p:cSld>
     <p:spTree>
       <p:nvGrpSpPr>
@@ -3861,7 +4874,14 @@
         <p:cNvGrpSpPr/>
         <p:nvPr/>
       </p:nvGrpSpPr>
-      <p:grpSpPr/>
+      <p:grpSpPr>
+        <a:xfrm>
+          <a:off x="0" y="0"/>
+          <a:ext cx="0" cy="0"/>
+          <a:chOff x="0" y="0"/>
+          <a:chExt cx="0" cy="0"/>
+        </a:xfrm>
+      </p:grpSpPr>
       <p:sp>
         <p:nvSpPr>
           <p:cNvPr id="2" name="Title 1"/>
@@ -3878,7 +4898,8 @@
           <a:lstStyle/>
           <a:p>
             <a:r>
-              <a:t>Results: AI vs. Human</a:t>
+              <a:rPr dirty="0"/>
+              <a:t>Our Solution: Taxonomy + LLM Pipeline</a:t>
             </a:r>
           </a:p>
         </p:txBody>
@@ -3895,49 +4916,75 @@
         </p:nvSpPr>
         <p:spPr/>
         <p:txBody>
-          <a:bodyPr/>
-          <a:lstStyle/>
-          <a:p>
-            <a:r>
-              <a:t>Test: Contract 90051045 (ASTRA/SBB Bridge Balsberg)</a:t>
-            </a:r>
-          </a:p>
-          <a:p/>
-          <a:p>
-            <a:r>
-              <a:t>✅ 7/10 fields match with Masterdatei</a:t>
-            </a:r>
-          </a:p>
-          <a:p>
-            <a:r>
-              <a:t>✅ Cost split correctly extracted (CHF 15.8M, 45%/55%)</a:t>
-            </a:r>
-          </a:p>
-          <a:p>
-            <a:r>
-              <a:t>✅ Predecessor contract identified (from 1968)</a:t>
-            </a:r>
-          </a:p>
-          <a:p/>
-          <a:p>
-            <a:r>
-              <a:t>❌ 1 field: AI is MORE CORRECT than human data!</a:t>
-            </a:r>
-          </a:p>
-          <a:p>
-            <a:r>
-              <a:t>   Masterdatei: "Bahnübergang" (wrong)</a:t>
-            </a:r>
-          </a:p>
-          <a:p>
-            <a:r>
-              <a:t>   Contract says: "Bahnbrücke" (correct)</a:t>
-            </a:r>
-          </a:p>
-          <a:p/>
-          <a:p>
-            <a:r>
-              <a:t>→ The AI found an error humans missed.</a:t>
+          <a:bodyPr>
+            <a:normAutofit fontScale="92500" lnSpcReduction="20000"/>
+          </a:bodyPr>
+          <a:lstStyle/>
+          <a:p>
+            <a:r>
+              <a:rPr dirty="0"/>
+              <a:t>Step 1: </a:t>
+            </a:r>
+            <a:r>
+              <a:rPr dirty="0" err="1"/>
+              <a:t>taxonomy.yaml</a:t>
+            </a:r>
+            <a:endParaRPr dirty="0"/>
+          </a:p>
+          <a:p>
+            <a:r>
+              <a:rPr dirty="0"/>
+              <a:t>  → Contract types as machine-readable schema</a:t>
+            </a:r>
+          </a:p>
+          <a:p>
+            <a:r>
+              <a:rPr dirty="0"/>
+              <a:t>  → 3 disjoint building-block pools</a:t>
+            </a:r>
+          </a:p>
+          <a:p>
+            <a:endParaRPr dirty="0"/>
+          </a:p>
+          <a:p>
+            <a:r>
+              <a:rPr dirty="0"/>
+              <a:t>Step 2: Extraction Pipeline</a:t>
+            </a:r>
+          </a:p>
+          <a:p>
+            <a:r>
+              <a:rPr dirty="0"/>
+              <a:t>  PDF → </a:t>
+            </a:r>
+            <a:r>
+              <a:rPr dirty="0" err="1"/>
+              <a:t>markitdown</a:t>
+            </a:r>
+            <a:r>
+              <a:rPr dirty="0"/>
+              <a:t> → LLM + System Prompt → JSON</a:t>
+            </a:r>
+          </a:p>
+          <a:p>
+            <a:endParaRPr dirty="0"/>
+          </a:p>
+          <a:p>
+            <a:r>
+              <a:rPr dirty="0"/>
+              <a:t>Step 3: Validation</a:t>
+            </a:r>
+          </a:p>
+          <a:p>
+            <a:r>
+              <a:rPr dirty="0"/>
+              <a:t>  → Quality indicator + source reference per field</a:t>
+            </a:r>
+          </a:p>
+          <a:p>
+            <a:r>
+              <a:rPr dirty="0"/>
+              <a:t>  → Only allowed taxonomy combinations pass</a:t>
             </a:r>
           </a:p>
         </p:txBody>
@@ -3951,7 +4998,7 @@
 </file>
 
 <file path=ppt/slides/slide7.xml><?xml version="1.0" encoding="utf-8"?>
-<p:sld xmlns:a="http://schemas.openxmlformats.org/drawingml/2006/main" xmlns:p="http://schemas.openxmlformats.org/presentationml/2006/main" xmlns:r="http://schemas.openxmlformats.org/officeDocument/2006/relationships">
+<p:sld xmlns:a="http://schemas.openxmlformats.org/drawingml/2006/main" xmlns:r="http://schemas.openxmlformats.org/officeDocument/2006/relationships" xmlns:p="http://schemas.openxmlformats.org/presentationml/2006/main">
   <p:cSld>
     <p:spTree>
       <p:nvGrpSpPr>
@@ -3959,7 +5006,14 @@
         <p:cNvGrpSpPr/>
         <p:nvPr/>
       </p:nvGrpSpPr>
-      <p:grpSpPr/>
+      <p:grpSpPr>
+        <a:xfrm>
+          <a:off x="0" y="0"/>
+          <a:ext cx="0" cy="0"/>
+          <a:chOff x="0" y="0"/>
+          <a:chExt cx="0" cy="0"/>
+        </a:xfrm>
+      </p:grpSpPr>
       <p:sp>
         <p:nvSpPr>
           <p:cNvPr id="2" name="Title 1"/>
@@ -3976,7 +5030,7 @@
           <a:lstStyle/>
           <a:p>
             <a:r>
-              <a:t>Multi-LLM Verification</a:t>
+              <a:t>Contract Taxonomy (4 Levels)</a:t>
             </a:r>
           </a:p>
         </p:txBody>
@@ -3993,33 +5047,51 @@
         </p:nvSpPr>
         <p:spPr/>
         <p:txBody>
-          <a:bodyPr/>
-          <a:lstStyle/>
-          <a:p>
-            <a:r>
-              <a:t>Same prompt, same input – two models:</a:t>
-            </a:r>
-          </a:p>
-          <a:p/>
-          <a:p>
-            <a:r>
-              <a:t>• Claude Sonnet 4 (Anthropic) → ✅ validated</a:t>
-            </a:r>
-          </a:p>
-          <a:p>
-            <a:r>
-              <a:t>• Cortex (SBB internal) → results pending</a:t>
-            </a:r>
-          </a:p>
-          <a:p/>
-          <a:p>
-            <a:r>
-              <a:t>→ Cross-model validation increases confidence</a:t>
-            </a:r>
-          </a:p>
-          <a:p>
-            <a:r>
-              <a:t>→ Quality indicators: eindeutig / abgeleitet / fehlend</a:t>
+          <a:bodyPr>
+            <a:normAutofit lnSpcReduction="10000"/>
+          </a:bodyPr>
+          <a:lstStyle/>
+          <a:p>
+            <a:r>
+              <a:t>Ebene 1: Infrastrukturverträge</a:t>
+            </a:r>
+          </a:p>
+          <a:p>
+            <a:r>
+              <a:t>├─ Ebene 2: Zusammenarbeit bei Anlagen</a:t>
+            </a:r>
+          </a:p>
+          <a:p>
+            <a:r>
+              <a:t>│  └─ Ebene 3: Phases (V1–V4)</a:t>
+            </a:r>
+          </a:p>
+          <a:p>
+            <a:r>
+              <a:t>│     └─ Ebene 4: Pool A (9 building blocks)</a:t>
+            </a:r>
+          </a:p>
+          <a:p>
+            <a:r>
+              <a:t>└─ Ebene 2: Grundstücknutzung</a:t>
+            </a:r>
+          </a:p>
+          <a:p>
+            <a:r>
+              <a:t>   ├─ Ebene 3: Nutzungsverträge → Pool B (4)</a:t>
+            </a:r>
+          </a:p>
+          <a:p>
+            <a:r>
+              <a:t>   └─ Ebene 3: Bauten Dritter → Pool C (2)</a:t>
+            </a:r>
+          </a:p>
+          <a:p>
+            <a:endParaRPr/>
+          </a:p>
+          <a:p>
+            <a:r>
+              <a:t>3 disjoint pools – validated combinations only</a:t>
             </a:r>
           </a:p>
         </p:txBody>
@@ -4033,7 +5105,7 @@
 </file>
 
 <file path=ppt/slides/slide8.xml><?xml version="1.0" encoding="utf-8"?>
-<p:sld xmlns:a="http://schemas.openxmlformats.org/drawingml/2006/main" xmlns:p="http://schemas.openxmlformats.org/presentationml/2006/main" xmlns:r="http://schemas.openxmlformats.org/officeDocument/2006/relationships">
+<p:sld xmlns:a="http://schemas.openxmlformats.org/drawingml/2006/main" xmlns:r="http://schemas.openxmlformats.org/officeDocument/2006/relationships" xmlns:p="http://schemas.openxmlformats.org/presentationml/2006/main">
   <p:cSld>
     <p:spTree>
       <p:nvGrpSpPr>
@@ -4041,7 +5113,14 @@
         <p:cNvGrpSpPr/>
         <p:nvPr/>
       </p:nvGrpSpPr>
-      <p:grpSpPr/>
+      <p:grpSpPr>
+        <a:xfrm>
+          <a:off x="0" y="0"/>
+          <a:ext cx="0" cy="0"/>
+          <a:chOff x="0" y="0"/>
+          <a:chExt cx="0" cy="0"/>
+        </a:xfrm>
+      </p:grpSpPr>
       <p:sp>
         <p:nvSpPr>
           <p:cNvPr id="2" name="Title 1"/>
@@ -4058,7 +5137,7 @@
           <a:lstStyle/>
           <a:p>
             <a:r>
-              <a:t>Roadmap: Manual → Automated</a:t>
+              <a:t>Results: AI vs. Human</a:t>
             </a:r>
           </a:p>
         </p:txBody>
@@ -4075,64 +5154,57 @@
         </p:nvSpPr>
         <p:spPr/>
         <p:txBody>
-          <a:bodyPr/>
-          <a:lstStyle/>
-          <a:p>
-            <a:r>
-              <a:t>TODAY (Hackathon)</a:t>
-            </a:r>
-          </a:p>
-          <a:p>
-            <a:r>
-              <a:t>  1 contract, manual QA, 2 LLMs</a:t>
-            </a:r>
-          </a:p>
-          <a:p/>
-          <a:p>
-            <a:r>
-              <a:t>NEXT (3–6 months)</a:t>
-            </a:r>
-          </a:p>
-          <a:p>
-            <a:r>
-              <a:t>  Batch 5,000 contracts, Human-in-the-Loop, SAP Prefill</a:t>
-            </a:r>
-          </a:p>
-          <a:p/>
-          <a:p>
-            <a:r>
-              <a:t>FUTURE</a:t>
-            </a:r>
-          </a:p>
-          <a:p>
-            <a:r>
-              <a:t>  Asset linking (contract → physical structure via UUID)</a:t>
-            </a:r>
-          </a:p>
-          <a:p>
-            <a:r>
-              <a:t>  Contract relationship graph</a:t>
-            </a:r>
-          </a:p>
-          <a:p>
-            <a:r>
-              <a:t>  Cross-railway: DB / ÖBB / SBB</a:t>
-            </a:r>
-          </a:p>
-          <a:p>
-            <a:r>
-              <a:t>  Compliance check vs. OSCAL4Rail (Challenge 1)</a:t>
-            </a:r>
-          </a:p>
-          <a:p/>
-          <a:p>
-            <a:r>
-              <a:t>⚡ The AI proposes, the human decides.</a:t>
-            </a:r>
-          </a:p>
-          <a:p>
-            <a:r>
-              <a:t>   Uncertain fields always go to human verification.</a:t>
+          <a:bodyPr>
+            <a:normAutofit fontScale="85000" lnSpcReduction="20000"/>
+          </a:bodyPr>
+          <a:lstStyle/>
+          <a:p>
+            <a:r>
+              <a:t>Test: Contract 90051045 (ASTRA/SBB Bridge Balsberg)</a:t>
+            </a:r>
+          </a:p>
+          <a:p>
+            <a:endParaRPr/>
+          </a:p>
+          <a:p>
+            <a:r>
+              <a:t>✅ 7/10 fields match with Masterdatei</a:t>
+            </a:r>
+          </a:p>
+          <a:p>
+            <a:r>
+              <a:t>✅ Cost split correctly extracted (CHF 15.8M, 45%/55%)</a:t>
+            </a:r>
+          </a:p>
+          <a:p>
+            <a:r>
+              <a:t>✅ Predecessor contract identified (from 1968)</a:t>
+            </a:r>
+          </a:p>
+          <a:p>
+            <a:endParaRPr/>
+          </a:p>
+          <a:p>
+            <a:r>
+              <a:t>❌ 1 field: AI is MORE CORRECT than human data!</a:t>
+            </a:r>
+          </a:p>
+          <a:p>
+            <a:r>
+              <a:t>   Masterdatei: "Bahnübergang" (wrong)</a:t>
+            </a:r>
+          </a:p>
+          <a:p>
+            <a:r>
+              <a:t>   Contract says: "Bahnbrücke" (correct)</a:t>
+            </a:r>
+          </a:p>
+          <a:p>
+            <a:endParaRPr/>
+          </a:p>
+          <a:p>
+            <a:r>
+              <a:t>→ The AI found an error humans missed.</a:t>
             </a:r>
           </a:p>
         </p:txBody>
@@ -4146,7 +5218,7 @@
 </file>
 
 <file path=ppt/slides/slide9.xml><?xml version="1.0" encoding="utf-8"?>
-<p:sld xmlns:a="http://schemas.openxmlformats.org/drawingml/2006/main" xmlns:p="http://schemas.openxmlformats.org/presentationml/2006/main" xmlns:r="http://schemas.openxmlformats.org/officeDocument/2006/relationships">
+<p:sld xmlns:a="http://schemas.openxmlformats.org/drawingml/2006/main" xmlns:r="http://schemas.openxmlformats.org/officeDocument/2006/relationships" xmlns:p="http://schemas.openxmlformats.org/presentationml/2006/main">
   <p:cSld>
     <p:spTree>
       <p:nvGrpSpPr>
@@ -4154,7 +5226,14 @@
         <p:cNvGrpSpPr/>
         <p:nvPr/>
       </p:nvGrpSpPr>
-      <p:grpSpPr/>
+      <p:grpSpPr>
+        <a:xfrm>
+          <a:off x="0" y="0"/>
+          <a:ext cx="0" cy="0"/>
+          <a:chOff x="0" y="0"/>
+          <a:chExt cx="0" cy="0"/>
+        </a:xfrm>
+      </p:grpSpPr>
       <p:sp>
         <p:nvSpPr>
           <p:cNvPr id="2" name="Title 1"/>
@@ -4162,7 +5241,7 @@
             <a:spLocks noGrp="1"/>
           </p:cNvSpPr>
           <p:nvPr>
-            <p:ph type="ctrTitle"/>
+            <p:ph type="title"/>
           </p:nvPr>
         </p:nvSpPr>
         <p:spPr/>
@@ -4171,19 +5250,19 @@
           <a:lstStyle/>
           <a:p>
             <a:r>
-              <a:t>We are the ConTextractors.</a:t>
-            </a:r>
-          </a:p>
-        </p:txBody>
-      </p:sp>
-      <p:sp>
-        <p:nvSpPr>
-          <p:cNvPr id="3" name="Subtitle 2"/>
-          <p:cNvSpPr>
-            <a:spLocks noGrp="1"/>
-          </p:cNvSpPr>
-          <p:nvPr>
-            <p:ph type="subTitle" idx="1"/>
+              <a:t>Multi-LLM Verification</a:t>
+            </a:r>
+          </a:p>
+        </p:txBody>
+      </p:sp>
+      <p:sp>
+        <p:nvSpPr>
+          <p:cNvPr id="3" name="Content Placeholder 2"/>
+          <p:cNvSpPr>
+            <a:spLocks noGrp="1"/>
+          </p:cNvSpPr>
+          <p:nvPr>
+            <p:ph idx="1"/>
           </p:nvPr>
         </p:nvSpPr>
         <p:spPr/>
@@ -4192,18 +5271,33 @@
           <a:lstStyle/>
           <a:p>
             <a:r>
-              <a:t>Contract + Text + Extractors</a:t>
-            </a:r>
-          </a:p>
-          <a:p/>
-          <a:p>
-            <a:r>
-              <a:t>From Aktenordner to structured, validated data.</a:t>
-            </a:r>
-          </a:p>
-          <a:p>
-            <a:r>
-              <a:t>With source references. In seconds, not days.</a:t>
+              <a:t>Same prompt, same input – two models:</a:t>
+            </a:r>
+          </a:p>
+          <a:p>
+            <a:endParaRPr/>
+          </a:p>
+          <a:p>
+            <a:r>
+              <a:t>• Claude Sonnet 4 (Anthropic) → ✅ validated</a:t>
+            </a:r>
+          </a:p>
+          <a:p>
+            <a:r>
+              <a:t>• Cortex (SBB internal) → results pending</a:t>
+            </a:r>
+          </a:p>
+          <a:p>
+            <a:endParaRPr/>
+          </a:p>
+          <a:p>
+            <a:r>
+              <a:t>→ Cross-model validation increases confidence</a:t>
+            </a:r>
+          </a:p>
+          <a:p>
+            <a:r>
+              <a:t>→ Quality indicators: eindeutig / abgeleitet / fehlend</a:t>
             </a:r>
           </a:p>
         </p:txBody>
@@ -4532,18 +5626,6 @@
 </file>
 
 <file path=customXml/item1.xml><?xml version="1.0" encoding="utf-8"?>
-<p:properties xmlns:p="http://schemas.microsoft.com/office/2006/metadata/properties" xmlns:xsi="http://www.w3.org/2001/XMLSchema-instance" xmlns:pc="http://schemas.microsoft.com/office/infopath/2007/PartnerControls">
-  <documentManagement>
-    <Copyright xmlns="b106c448-c3d1-41cc-8fd9-3acb307364b4" xsi:nil="true"/>
-    <lcf76f155ced4ddcb4097134ff3c332f xmlns="b106c448-c3d1-41cc-8fd9-3acb307364b4">
-      <Terms xmlns="http://schemas.microsoft.com/office/infopath/2007/PartnerControls"/>
-    </lcf76f155ced4ddcb4097134ff3c332f>
-    <TaxCatchAll xmlns="b043894e-b4c8-44d0-9690-d7947297ac19" xsi:nil="true"/>
-  </documentManagement>
-</p:properties>
-</file>
-
-<file path=customXml/item2.xml><?xml version="1.0" encoding="utf-8"?>
 <ct:contentTypeSchema xmlns:ct="http://schemas.microsoft.com/office/2006/metadata/contentType" xmlns:ma="http://schemas.microsoft.com/office/2006/metadata/properties/metaAttributes" ct:_="" ma:_="" ma:contentTypeName="Dokument" ma:contentTypeID="0x010100C5895299445B8C4DB378BBB718B1F939" ma:contentTypeVersion="18" ma:contentTypeDescription="Ein neues Dokument erstellen." ma:contentTypeScope="" ma:versionID="ca18c32604eb9eb075bdd5b520f76d7f">
   <xsd:schema xmlns:xsd="http://www.w3.org/2001/XMLSchema" xmlns:xs="http://www.w3.org/2001/XMLSchema" xmlns:p="http://schemas.microsoft.com/office/2006/metadata/properties" xmlns:ns2="b106c448-c3d1-41cc-8fd9-3acb307364b4" xmlns:ns3="b043894e-b4c8-44d0-9690-d7947297ac19" targetNamespace="http://schemas.microsoft.com/office/2006/metadata/properties" ma:root="true" ma:fieldsID="0e0a0918b2fa3636e306fde1bc5c258b" ns2:_="" ns3:_="">
     <xsd:import namespace="b106c448-c3d1-41cc-8fd9-3acb307364b4"/>
@@ -4788,6 +5870,18 @@
 </ct:contentTypeSchema>
 </file>
 
+<file path=customXml/item2.xml><?xml version="1.0" encoding="utf-8"?>
+<p:properties xmlns:p="http://schemas.microsoft.com/office/2006/metadata/properties" xmlns:xsi="http://www.w3.org/2001/XMLSchema-instance" xmlns:pc="http://schemas.microsoft.com/office/infopath/2007/PartnerControls">
+  <documentManagement>
+    <Copyright xmlns="b106c448-c3d1-41cc-8fd9-3acb307364b4" xsi:nil="true"/>
+    <lcf76f155ced4ddcb4097134ff3c332f xmlns="b106c448-c3d1-41cc-8fd9-3acb307364b4">
+      <Terms xmlns="http://schemas.microsoft.com/office/infopath/2007/PartnerControls"/>
+    </lcf76f155ced4ddcb4097134ff3c332f>
+    <TaxCatchAll xmlns="b043894e-b4c8-44d0-9690-d7947297ac19" xsi:nil="true"/>
+  </documentManagement>
+</p:properties>
+</file>
+
 <file path=customXml/item3.xml><?xml version="1.0" encoding="utf-8"?>
 <?mso-contentType ?>
 <FormTemplates xmlns="http://schemas.microsoft.com/sharepoint/v3/contenttype/forms">
@@ -4798,23 +5892,6 @@
 </file>
 
 <file path=customXml/itemProps1.xml><?xml version="1.0" encoding="utf-8"?>
-<ds:datastoreItem xmlns:ds="http://schemas.openxmlformats.org/officeDocument/2006/customXml" ds:itemID="{B6D2420F-AFAE-4394-AC5D-D74FCC39CD53}">
-  <ds:schemaRefs>
-    <ds:schemaRef ds:uri="http://schemas.microsoft.com/office/infopath/2007/PartnerControls"/>
-    <ds:schemaRef ds:uri="http://www.w3.org/XML/1998/namespace"/>
-    <ds:schemaRef ds:uri="http://schemas.microsoft.com/office/2006/metadata/properties"/>
-    <ds:schemaRef ds:uri="http://purl.org/dc/elements/1.1/"/>
-    <ds:schemaRef ds:uri="http://schemas.openxmlformats.org/package/2006/metadata/core-properties"/>
-    <ds:schemaRef ds:uri="b043894e-b4c8-44d0-9690-d7947297ac19"/>
-    <ds:schemaRef ds:uri="http://schemas.microsoft.com/office/2006/documentManagement/types"/>
-    <ds:schemaRef ds:uri="b106c448-c3d1-41cc-8fd9-3acb307364b4"/>
-    <ds:schemaRef ds:uri="http://purl.org/dc/dcmitype/"/>
-    <ds:schemaRef ds:uri="http://purl.org/dc/terms/"/>
-  </ds:schemaRefs>
-</ds:datastoreItem>
-</file>
-
-<file path=customXml/itemProps2.xml><?xml version="1.0" encoding="utf-8"?>
 <ds:datastoreItem xmlns:ds="http://schemas.openxmlformats.org/officeDocument/2006/customXml" ds:itemID="{0BED3A9D-D1E4-45EA-8B49-CB6F60C2A98A}">
   <ds:schemaRefs>
     <ds:schemaRef ds:uri="http://schemas.microsoft.com/office/2006/metadata/contentType"/>
@@ -4833,6 +5910,23 @@
 </ds:datastoreItem>
 </file>
 
+<file path=customXml/itemProps2.xml><?xml version="1.0" encoding="utf-8"?>
+<ds:datastoreItem xmlns:ds="http://schemas.openxmlformats.org/officeDocument/2006/customXml" ds:itemID="{B6D2420F-AFAE-4394-AC5D-D74FCC39CD53}">
+  <ds:schemaRefs>
+    <ds:schemaRef ds:uri="http://schemas.microsoft.com/office/infopath/2007/PartnerControls"/>
+    <ds:schemaRef ds:uri="http://www.w3.org/XML/1998/namespace"/>
+    <ds:schemaRef ds:uri="http://schemas.microsoft.com/office/2006/metadata/properties"/>
+    <ds:schemaRef ds:uri="http://purl.org/dc/elements/1.1/"/>
+    <ds:schemaRef ds:uri="http://schemas.openxmlformats.org/package/2006/metadata/core-properties"/>
+    <ds:schemaRef ds:uri="b043894e-b4c8-44d0-9690-d7947297ac19"/>
+    <ds:schemaRef ds:uri="http://schemas.microsoft.com/office/2006/documentManagement/types"/>
+    <ds:schemaRef ds:uri="b106c448-c3d1-41cc-8fd9-3acb307364b4"/>
+    <ds:schemaRef ds:uri="http://purl.org/dc/dcmitype/"/>
+    <ds:schemaRef ds:uri="http://purl.org/dc/terms/"/>
+  </ds:schemaRefs>
+</ds:datastoreItem>
+</file>
+
 <file path=customXml/itemProps3.xml><?xml version="1.0" encoding="utf-8"?>
 <ds:datastoreItem xmlns:ds="http://schemas.openxmlformats.org/officeDocument/2006/customXml" ds:itemID="{47CF5FD6-43E2-4C9A-9372-C9D60EE1772B}">
   <ds:schemaRefs>

--- a/aca/TheContextractors_H4R2026_Ch11.pptx
+++ b/aca/TheContextractors_H4R2026_Ch11.pptx
@@ -11,10 +11,10 @@
     <p:sldId id="266" r:id="rId8"/>
     <p:sldId id="265" r:id="rId9"/>
     <p:sldId id="259" r:id="rId10"/>
-    <p:sldId id="260" r:id="rId11"/>
-    <p:sldId id="261" r:id="rId12"/>
-    <p:sldId id="262" r:id="rId13"/>
-    <p:sldId id="263" r:id="rId14"/>
+    <p:sldId id="261" r:id="rId11"/>
+    <p:sldId id="260" r:id="rId12"/>
+    <p:sldId id="263" r:id="rId13"/>
+    <p:sldId id="262" r:id="rId14"/>
     <p:sldId id="264" r:id="rId15"/>
   </p:sldIdLst>
   <p:sldSz cx="12192000" cy="6858000"/>
@@ -3413,8 +3413,10 @@
           <a:lstStyle/>
           <a:p>
             <a:r>
+              <a:rPr dirty="0" err="1"/>
               <a:t>ConTextractors</a:t>
             </a:r>
+            <a:endParaRPr dirty="0"/>
           </a:p>
         </p:txBody>
       </p:sp>
@@ -3434,11 +3436,13 @@
           <a:lstStyle/>
           <a:p>
             <a:r>
+              <a:rPr dirty="0"/>
               <a:t>Automatic Contract Analysis</a:t>
             </a:r>
           </a:p>
           <a:p>
             <a:r>
+              <a:rPr dirty="0"/>
               <a:t>Hack4Rail 2026 – Team A38</a:t>
             </a:r>
           </a:p>
@@ -3453,7 +3457,7 @@
 </file>
 
 <file path=ppt/slides/slide10.xml><?xml version="1.0" encoding="utf-8"?>
-<p:sld xmlns:a="http://schemas.openxmlformats.org/drawingml/2006/main" xmlns:r="http://schemas.openxmlformats.org/officeDocument/2006/relationships" xmlns:p="http://schemas.openxmlformats.org/presentationml/2006/main">
+<p:sld xmlns:a="http://schemas.openxmlformats.org/drawingml/2006/main" xmlns:r="http://schemas.openxmlformats.org/officeDocument/2006/relationships" xmlns:p="http://schemas.openxmlformats.org/presentationml/2006/main" show="0">
   <p:cSld>
     <p:spTree>
       <p:nvGrpSpPr>
@@ -3485,7 +3489,7 @@
           <a:lstStyle/>
           <a:p>
             <a:r>
-              <a:t>Roadmap: Manual → Automated</a:t>
+              <a:t>Multi-LLM Verification</a:t>
             </a:r>
           </a:p>
         </p:txBody>
@@ -3502,18 +3506,11 @@
         </p:nvSpPr>
         <p:spPr/>
         <p:txBody>
-          <a:bodyPr>
-            <a:normAutofit fontScale="55000" lnSpcReduction="20000"/>
-          </a:bodyPr>
-          <a:lstStyle/>
-          <a:p>
-            <a:r>
-              <a:t>TODAY (Hackathon)</a:t>
-            </a:r>
-          </a:p>
-          <a:p>
-            <a:r>
-              <a:t>  1 contract, manual QA, 2 LLMs</a:t>
+          <a:bodyPr/>
+          <a:lstStyle/>
+          <a:p>
+            <a:r>
+              <a:t>Same prompt, same input – two models:</a:t>
             </a:r>
           </a:p>
           <a:p>
@@ -3521,12 +3518,12 @@
           </a:p>
           <a:p>
             <a:r>
-              <a:t>NEXT (3–6 months)</a:t>
-            </a:r>
-          </a:p>
-          <a:p>
-            <a:r>
-              <a:t>  Batch 5,000 contracts, Human-in-the-Loop, SAP Prefill</a:t>
+              <a:t>• Claude Sonnet 4 (Anthropic) → ✅ validated</a:t>
+            </a:r>
+          </a:p>
+          <a:p>
+            <a:r>
+              <a:t>• Cortex (SBB internal) → results pending</a:t>
             </a:r>
           </a:p>
           <a:p>
@@ -3534,40 +3531,12 @@
           </a:p>
           <a:p>
             <a:r>
-              <a:t>FUTURE</a:t>
-            </a:r>
-          </a:p>
-          <a:p>
-            <a:r>
-              <a:t>  Asset linking (contract → physical structure via UUID)</a:t>
-            </a:r>
-          </a:p>
-          <a:p>
-            <a:r>
-              <a:t>  Contract relationship graph</a:t>
-            </a:r>
-          </a:p>
-          <a:p>
-            <a:r>
-              <a:t>  Cross-railway: DB / ÖBB / SBB</a:t>
-            </a:r>
-          </a:p>
-          <a:p>
-            <a:r>
-              <a:t>  Compliance check vs. OSCAL4Rail (Challenge 1)</a:t>
-            </a:r>
-          </a:p>
-          <a:p>
-            <a:endParaRPr/>
-          </a:p>
-          <a:p>
-            <a:r>
-              <a:t>⚡ The AI proposes, the human decides.</a:t>
-            </a:r>
-          </a:p>
-          <a:p>
-            <a:r>
-              <a:t>   Uncertain fields always go to human verification.</a:t>
+              <a:t>→ Cross-model validation increases confidence</a:t>
+            </a:r>
+          </a:p>
+          <a:p>
+            <a:r>
+              <a:t>→ Quality indicators: eindeutig / abgeleitet / fehlend</a:t>
             </a:r>
           </a:p>
         </p:txBody>
@@ -4210,7 +4179,14 @@
             </a:r>
             <a:r>
               <a:rPr lang="de-DE" dirty="0"/>
-              <a:t> 1926  </a:t>
+              <a:t> 1926</a:t>
+            </a:r>
+          </a:p>
+          <a:p>
+            <a:pPr algn="ctr"/>
+            <a:r>
+              <a:rPr lang="de-DE" dirty="0"/>
+              <a:t>&amp; </a:t>
             </a:r>
             <a:r>
               <a:rPr lang="de-DE" dirty="0" err="1"/>
@@ -4852,6 +4828,42 @@
           </a:prstGeom>
         </p:spPr>
       </p:pic>
+      <p:pic>
+        <p:nvPicPr>
+          <p:cNvPr id="4" name="Grafik 3">
+            <a:extLst>
+              <a:ext uri="{FF2B5EF4-FFF2-40B4-BE49-F238E27FC236}">
+                <a16:creationId xmlns:a16="http://schemas.microsoft.com/office/drawing/2014/main" id="{8AE79831-E45A-8A77-295B-DBFBEDAC9865}"/>
+              </a:ext>
+            </a:extLst>
+          </p:cNvPr>
+          <p:cNvPicPr>
+            <a:picLocks noChangeAspect="1"/>
+          </p:cNvPicPr>
+          <p:nvPr/>
+        </p:nvPicPr>
+        <p:blipFill>
+          <a:blip r:embed="rId5">
+            <a:extLst>
+              <a:ext uri="{28A0092B-C50C-407E-A947-70E740481C1C}">
+                <a14:useLocalDpi xmlns:a14="http://schemas.microsoft.com/office/drawing/2010/main" val="0"/>
+              </a:ext>
+            </a:extLst>
+          </a:blip>
+          <a:stretch>
+            <a:fillRect/>
+          </a:stretch>
+        </p:blipFill>
+        <p:spPr>
+          <a:xfrm>
+            <a:off x="8834024" y="4028451"/>
+            <a:ext cx="1139879" cy="1139879"/>
+          </a:xfrm>
+          <a:prstGeom prst="rect">
+            <a:avLst/>
+          </a:prstGeom>
+        </p:spPr>
+      </p:pic>
     </p:spTree>
     <p:extLst>
       <p:ext uri="{BB962C8B-B14F-4D97-AF65-F5344CB8AC3E}">
@@ -5030,7 +5042,8 @@
           <a:lstStyle/>
           <a:p>
             <a:r>
-              <a:t>Contract Taxonomy (4 Levels)</a:t>
+              <a:rPr dirty="0"/>
+              <a:t>Results: AI vs. Human</a:t>
             </a:r>
           </a:p>
         </p:txBody>
@@ -5048,50 +5061,158 @@
         <p:spPr/>
         <p:txBody>
           <a:bodyPr>
-            <a:normAutofit lnSpcReduction="10000"/>
+            <a:normAutofit fontScale="92500" lnSpcReduction="20000"/>
           </a:bodyPr>
           <a:lstStyle/>
           <a:p>
-            <a:r>
-              <a:t>Ebene 1: Infrastrukturverträge</a:t>
-            </a:r>
-          </a:p>
-          <a:p>
-            <a:r>
-              <a:t>├─ Ebene 2: Zusammenarbeit bei Anlagen</a:t>
-            </a:r>
-          </a:p>
-          <a:p>
-            <a:r>
-              <a:t>│  └─ Ebene 3: Phases (V1–V4)</a:t>
-            </a:r>
-          </a:p>
-          <a:p>
-            <a:r>
-              <a:t>│     └─ Ebene 4: Pool A (9 building blocks)</a:t>
-            </a:r>
-          </a:p>
-          <a:p>
-            <a:r>
-              <a:t>└─ Ebene 2: Grundstücknutzung</a:t>
-            </a:r>
-          </a:p>
-          <a:p>
-            <a:r>
-              <a:t>   ├─ Ebene 3: Nutzungsverträge → Pool B (4)</a:t>
-            </a:r>
-          </a:p>
-          <a:p>
-            <a:r>
-              <a:t>   └─ Ebene 3: Bauten Dritter → Pool C (2)</a:t>
-            </a:r>
-          </a:p>
-          <a:p>
-            <a:endParaRPr/>
-          </a:p>
-          <a:p>
-            <a:r>
-              <a:t>3 disjoint pools – validated combinations only</a:t>
+            <a:pPr marL="0" indent="0">
+              <a:buNone/>
+            </a:pPr>
+            <a:r>
+              <a:rPr dirty="0"/>
+              <a:t>Test: Contract 90051045 (ASTRA/SBB Bridge </a:t>
+            </a:r>
+            <a:r>
+              <a:rPr dirty="0" err="1"/>
+              <a:t>Balsberg</a:t>
+            </a:r>
+            <a:r>
+              <a:rPr dirty="0"/>
+              <a:t>)</a:t>
+            </a:r>
+          </a:p>
+          <a:p>
+            <a:pPr marL="0" indent="0">
+              <a:buNone/>
+            </a:pPr>
+            <a:endParaRPr dirty="0"/>
+          </a:p>
+          <a:p>
+            <a:pPr marL="0" indent="0">
+              <a:buNone/>
+            </a:pPr>
+            <a:r>
+              <a:rPr dirty="0"/>
+              <a:t>✅ 7/10 fields match with </a:t>
+            </a:r>
+            <a:r>
+              <a:rPr dirty="0" err="1"/>
+              <a:t>Masterdatei</a:t>
+            </a:r>
+            <a:endParaRPr dirty="0"/>
+          </a:p>
+          <a:p>
+            <a:pPr marL="0" indent="0">
+              <a:buNone/>
+            </a:pPr>
+            <a:r>
+              <a:rPr dirty="0"/>
+              <a:t>✅ Cost split correctly extracted (CHF 15.8M, 45%/55%)</a:t>
+            </a:r>
+          </a:p>
+          <a:p>
+            <a:pPr marL="0" indent="0">
+              <a:buNone/>
+            </a:pPr>
+            <a:r>
+              <a:rPr dirty="0"/>
+              <a:t>✅ Predecessor contract identified (from 1968)</a:t>
+            </a:r>
+          </a:p>
+          <a:p>
+            <a:pPr marL="0" indent="0">
+              <a:buNone/>
+            </a:pPr>
+            <a:endParaRPr dirty="0"/>
+          </a:p>
+          <a:p>
+            <a:pPr marL="0" indent="0" algn="ctr">
+              <a:buNone/>
+            </a:pPr>
+            <a:r>
+              <a:rPr dirty="0"/>
+              <a:t> 1 field: AI is </a:t>
+            </a:r>
+            <a:r>
+              <a:rPr dirty="0">
+                <a:solidFill>
+                  <a:srgbClr val="FF0000"/>
+                </a:solidFill>
+              </a:rPr>
+              <a:t>MORE CORRECT </a:t>
+            </a:r>
+            <a:r>
+              <a:rPr dirty="0"/>
+              <a:t>than human data!</a:t>
+            </a:r>
+            <a:br>
+              <a:rPr lang="de-CH" dirty="0"/>
+            </a:br>
+            <a:endParaRPr lang="de-CH" dirty="0"/>
+          </a:p>
+          <a:p>
+            <a:pPr marL="0" indent="0" algn="ctr">
+              <a:buNone/>
+            </a:pPr>
+            <a:r>
+              <a:rPr lang="de-CH" sz="2400" dirty="0"/>
+              <a:t>❌ </a:t>
+            </a:r>
+            <a:r>
+              <a:rPr dirty="0" err="1"/>
+              <a:t>Masterdatei</a:t>
+            </a:r>
+            <a:r>
+              <a:rPr dirty="0"/>
+              <a:t>: "</a:t>
+            </a:r>
+            <a:r>
+              <a:rPr dirty="0" err="1"/>
+              <a:t>Bahnübergang</a:t>
+            </a:r>
+            <a:r>
+              <a:rPr dirty="0"/>
+              <a:t>"</a:t>
+            </a:r>
+            <a:r>
+              <a:rPr lang="de-CH" dirty="0"/>
+              <a:t> &lt;-&gt; </a:t>
+            </a:r>
+            <a:r>
+              <a:rPr dirty="0"/>
+              <a:t>Contract says: "</a:t>
+            </a:r>
+            <a:r>
+              <a:rPr dirty="0" err="1"/>
+              <a:t>Bahnbrücke</a:t>
+            </a:r>
+            <a:r>
+              <a:rPr dirty="0"/>
+              <a:t>"</a:t>
+            </a:r>
+            <a:r>
+              <a:rPr lang="de-CH" dirty="0"/>
+              <a:t> ✅ </a:t>
+            </a:r>
+            <a:endParaRPr dirty="0"/>
+          </a:p>
+          <a:p>
+            <a:pPr marL="0" indent="0" algn="ctr">
+              <a:buNone/>
+            </a:pPr>
+            <a:endParaRPr dirty="0"/>
+          </a:p>
+          <a:p>
+            <a:pPr marL="0" indent="0" algn="ctr">
+              <a:buNone/>
+            </a:pPr>
+            <a:r>
+              <a:rPr dirty="0">
+                <a:solidFill>
+                  <a:srgbClr val="FF0000"/>
+                </a:solidFill>
+              </a:rPr>
+              <a:t>→ The AI found an error humans missed.</a:t>
             </a:r>
           </a:p>
         </p:txBody>
@@ -5137,7 +5258,7 @@
           <a:lstStyle/>
           <a:p>
             <a:r>
-              <a:t>Results: AI vs. Human</a:t>
+              <a:t>Contract Taxonomy (4 Levels)</a:t>
             </a:r>
           </a:p>
         </p:txBody>
@@ -5155,12 +5276,42 @@
         <p:spPr/>
         <p:txBody>
           <a:bodyPr>
-            <a:normAutofit fontScale="85000" lnSpcReduction="20000"/>
+            <a:normAutofit lnSpcReduction="10000"/>
           </a:bodyPr>
           <a:lstStyle/>
           <a:p>
             <a:r>
-              <a:t>Test: Contract 90051045 (ASTRA/SBB Bridge Balsberg)</a:t>
+              <a:t>Ebene 1: Infrastrukturverträge</a:t>
+            </a:r>
+          </a:p>
+          <a:p>
+            <a:r>
+              <a:t>├─ Ebene 2: Zusammenarbeit bei Anlagen</a:t>
+            </a:r>
+          </a:p>
+          <a:p>
+            <a:r>
+              <a:t>│  └─ Ebene 3: Phases (V1–V4)</a:t>
+            </a:r>
+          </a:p>
+          <a:p>
+            <a:r>
+              <a:t>│     └─ Ebene 4: Pool A (9 building blocks)</a:t>
+            </a:r>
+          </a:p>
+          <a:p>
+            <a:r>
+              <a:t>└─ Ebene 2: Grundstücknutzung</a:t>
+            </a:r>
+          </a:p>
+          <a:p>
+            <a:r>
+              <a:t>   ├─ Ebene 3: Nutzungsverträge → Pool B (4)</a:t>
+            </a:r>
+          </a:p>
+          <a:p>
+            <a:r>
+              <a:t>   └─ Ebene 3: Bauten Dritter → Pool C (2)</a:t>
             </a:r>
           </a:p>
           <a:p>
@@ -5168,43 +5319,7 @@
           </a:p>
           <a:p>
             <a:r>
-              <a:t>✅ 7/10 fields match with Masterdatei</a:t>
-            </a:r>
-          </a:p>
-          <a:p>
-            <a:r>
-              <a:t>✅ Cost split correctly extracted (CHF 15.8M, 45%/55%)</a:t>
-            </a:r>
-          </a:p>
-          <a:p>
-            <a:r>
-              <a:t>✅ Predecessor contract identified (from 1968)</a:t>
-            </a:r>
-          </a:p>
-          <a:p>
-            <a:endParaRPr/>
-          </a:p>
-          <a:p>
-            <a:r>
-              <a:t>❌ 1 field: AI is MORE CORRECT than human data!</a:t>
-            </a:r>
-          </a:p>
-          <a:p>
-            <a:r>
-              <a:t>   Masterdatei: "Bahnübergang" (wrong)</a:t>
-            </a:r>
-          </a:p>
-          <a:p>
-            <a:r>
-              <a:t>   Contract says: "Bahnbrücke" (correct)</a:t>
-            </a:r>
-          </a:p>
-          <a:p>
-            <a:endParaRPr/>
-          </a:p>
-          <a:p>
-            <a:r>
-              <a:t>→ The AI found an error humans missed.</a:t>
+              <a:t>3 disjoint pools – validated combinations only</a:t>
             </a:r>
           </a:p>
         </p:txBody>
@@ -5250,7 +5365,8 @@
           <a:lstStyle/>
           <a:p>
             <a:r>
-              <a:t>Multi-LLM Verification</a:t>
+              <a:rPr dirty="0"/>
+              <a:t>Roadmap: Manual → Automated</a:t>
             </a:r>
           </a:p>
         </p:txBody>
@@ -5267,37 +5383,99 @@
         </p:nvSpPr>
         <p:spPr/>
         <p:txBody>
-          <a:bodyPr/>
-          <a:lstStyle/>
-          <a:p>
-            <a:r>
-              <a:t>Same prompt, same input – two models:</a:t>
-            </a:r>
-          </a:p>
-          <a:p>
-            <a:endParaRPr/>
-          </a:p>
-          <a:p>
-            <a:r>
-              <a:t>• Claude Sonnet 4 (Anthropic) → ✅ validated</a:t>
-            </a:r>
-          </a:p>
-          <a:p>
-            <a:r>
-              <a:t>• Cortex (SBB internal) → results pending</a:t>
-            </a:r>
-          </a:p>
-          <a:p>
-            <a:endParaRPr/>
-          </a:p>
-          <a:p>
-            <a:r>
-              <a:t>→ Cross-model validation increases confidence</a:t>
-            </a:r>
-          </a:p>
-          <a:p>
-            <a:r>
-              <a:t>→ Quality indicators: eindeutig / abgeleitet / fehlend</a:t>
+          <a:bodyPr>
+            <a:normAutofit fontScale="55000" lnSpcReduction="20000"/>
+          </a:bodyPr>
+          <a:lstStyle/>
+          <a:p>
+            <a:r>
+              <a:rPr dirty="0"/>
+              <a:t>TODAY (Hackathon)</a:t>
+            </a:r>
+          </a:p>
+          <a:p>
+            <a:r>
+              <a:rPr dirty="0"/>
+              <a:t>  </a:t>
+            </a:r>
+            <a:r>
+              <a:rPr lang="de-CH" dirty="0"/>
+              <a:t>2</a:t>
+            </a:r>
+            <a:r>
+              <a:rPr dirty="0"/>
+              <a:t> contract, manual QA, 2 LLMs</a:t>
+            </a:r>
+          </a:p>
+          <a:p>
+            <a:endParaRPr dirty="0"/>
+          </a:p>
+          <a:p>
+            <a:r>
+              <a:rPr dirty="0"/>
+              <a:t>NEXT (3–6 months)</a:t>
+            </a:r>
+          </a:p>
+          <a:p>
+            <a:r>
+              <a:rPr dirty="0"/>
+              <a:t>  Batch </a:t>
+            </a:r>
+            <a:r>
+              <a:rPr lang="de-CH" dirty="0"/>
+              <a:t>10</a:t>
+            </a:r>
+            <a:r>
+              <a:rPr dirty="0"/>
+              <a:t>,000 contracts, Human-in-the-Loop, SAP Prefill</a:t>
+            </a:r>
+          </a:p>
+          <a:p>
+            <a:endParaRPr dirty="0"/>
+          </a:p>
+          <a:p>
+            <a:r>
+              <a:rPr dirty="0"/>
+              <a:t>FUTURE</a:t>
+            </a:r>
+          </a:p>
+          <a:p>
+            <a:r>
+              <a:rPr dirty="0"/>
+              <a:t>  Asset linking (contract → physical structure via UUID)</a:t>
+            </a:r>
+          </a:p>
+          <a:p>
+            <a:r>
+              <a:rPr dirty="0"/>
+              <a:t>  Contract relationship graph</a:t>
+            </a:r>
+          </a:p>
+          <a:p>
+            <a:r>
+              <a:rPr dirty="0"/>
+              <a:t>  Cross-railway: DB / ÖBB / SBB</a:t>
+            </a:r>
+          </a:p>
+          <a:p>
+            <a:r>
+              <a:rPr dirty="0"/>
+              <a:t>  Compliance check vs. OSCAL4Rail (Challenge 1)</a:t>
+            </a:r>
+          </a:p>
+          <a:p>
+            <a:endParaRPr dirty="0"/>
+          </a:p>
+          <a:p>
+            <a:r>
+              <a:rPr dirty="0"/>
+              <a:t>⚡ The AI proposes, the human decides.</a:t>
+            </a:r>
+          </a:p>
+          <a:p>
+            <a:r>
+              <a:rPr dirty="0"/>
+              <a:t>   Uncertain fields always go to human verification.</a:t>
             </a:r>
           </a:p>
         </p:txBody>
@@ -5626,6 +5804,27 @@
 </file>
 
 <file path=customXml/item1.xml><?xml version="1.0" encoding="utf-8"?>
+<?mso-contentType ?>
+<FormTemplates xmlns="http://schemas.microsoft.com/sharepoint/v3/contenttype/forms">
+  <Display>DocumentLibraryForm</Display>
+  <Edit>DocumentLibraryForm</Edit>
+  <New>DocumentLibraryForm</New>
+</FormTemplates>
+</file>
+
+<file path=customXml/item2.xml><?xml version="1.0" encoding="utf-8"?>
+<p:properties xmlns:p="http://schemas.microsoft.com/office/2006/metadata/properties" xmlns:xsi="http://www.w3.org/2001/XMLSchema-instance" xmlns:pc="http://schemas.microsoft.com/office/infopath/2007/PartnerControls">
+  <documentManagement>
+    <Copyright xmlns="b106c448-c3d1-41cc-8fd9-3acb307364b4" xsi:nil="true"/>
+    <lcf76f155ced4ddcb4097134ff3c332f xmlns="b106c448-c3d1-41cc-8fd9-3acb307364b4">
+      <Terms xmlns="http://schemas.microsoft.com/office/infopath/2007/PartnerControls"/>
+    </lcf76f155ced4ddcb4097134ff3c332f>
+    <TaxCatchAll xmlns="b043894e-b4c8-44d0-9690-d7947297ac19" xsi:nil="true"/>
+  </documentManagement>
+</p:properties>
+</file>
+
+<file path=customXml/item3.xml><?xml version="1.0" encoding="utf-8"?>
 <ct:contentTypeSchema xmlns:ct="http://schemas.microsoft.com/office/2006/metadata/contentType" xmlns:ma="http://schemas.microsoft.com/office/2006/metadata/properties/metaAttributes" ct:_="" ma:_="" ma:contentTypeName="Dokument" ma:contentTypeID="0x010100C5895299445B8C4DB378BBB718B1F939" ma:contentTypeVersion="18" ma:contentTypeDescription="Ein neues Dokument erstellen." ma:contentTypeScope="" ma:versionID="ca18c32604eb9eb075bdd5b520f76d7f">
   <xsd:schema xmlns:xsd="http://www.w3.org/2001/XMLSchema" xmlns:xs="http://www.w3.org/2001/XMLSchema" xmlns:p="http://schemas.microsoft.com/office/2006/metadata/properties" xmlns:ns2="b106c448-c3d1-41cc-8fd9-3acb307364b4" xmlns:ns3="b043894e-b4c8-44d0-9690-d7947297ac19" targetNamespace="http://schemas.microsoft.com/office/2006/metadata/properties" ma:root="true" ma:fieldsID="0e0a0918b2fa3636e306fde1bc5c258b" ns2:_="" ns3:_="">
     <xsd:import namespace="b106c448-c3d1-41cc-8fd9-3acb307364b4"/>
@@ -5870,42 +6069,10 @@
 </ct:contentTypeSchema>
 </file>
 
-<file path=customXml/item2.xml><?xml version="1.0" encoding="utf-8"?>
-<p:properties xmlns:p="http://schemas.microsoft.com/office/2006/metadata/properties" xmlns:xsi="http://www.w3.org/2001/XMLSchema-instance" xmlns:pc="http://schemas.microsoft.com/office/infopath/2007/PartnerControls">
-  <documentManagement>
-    <Copyright xmlns="b106c448-c3d1-41cc-8fd9-3acb307364b4" xsi:nil="true"/>
-    <lcf76f155ced4ddcb4097134ff3c332f xmlns="b106c448-c3d1-41cc-8fd9-3acb307364b4">
-      <Terms xmlns="http://schemas.microsoft.com/office/infopath/2007/PartnerControls"/>
-    </lcf76f155ced4ddcb4097134ff3c332f>
-    <TaxCatchAll xmlns="b043894e-b4c8-44d0-9690-d7947297ac19" xsi:nil="true"/>
-  </documentManagement>
-</p:properties>
-</file>
-
-<file path=customXml/item3.xml><?xml version="1.0" encoding="utf-8"?>
-<?mso-contentType ?>
-<FormTemplates xmlns="http://schemas.microsoft.com/sharepoint/v3/contenttype/forms">
-  <Display>DocumentLibraryForm</Display>
-  <Edit>DocumentLibraryForm</Edit>
-  <New>DocumentLibraryForm</New>
-</FormTemplates>
-</file>
-
 <file path=customXml/itemProps1.xml><?xml version="1.0" encoding="utf-8"?>
-<ds:datastoreItem xmlns:ds="http://schemas.openxmlformats.org/officeDocument/2006/customXml" ds:itemID="{0BED3A9D-D1E4-45EA-8B49-CB6F60C2A98A}">
+<ds:datastoreItem xmlns:ds="http://schemas.openxmlformats.org/officeDocument/2006/customXml" ds:itemID="{47CF5FD6-43E2-4C9A-9372-C9D60EE1772B}">
   <ds:schemaRefs>
-    <ds:schemaRef ds:uri="http://schemas.microsoft.com/office/2006/metadata/contentType"/>
-    <ds:schemaRef ds:uri="http://schemas.microsoft.com/office/2006/metadata/properties/metaAttributes"/>
-    <ds:schemaRef ds:uri="http://www.w3.org/2001/XMLSchema"/>
-    <ds:schemaRef ds:uri="http://schemas.microsoft.com/office/2006/metadata/properties"/>
-    <ds:schemaRef ds:uri="b106c448-c3d1-41cc-8fd9-3acb307364b4"/>
-    <ds:schemaRef ds:uri="b043894e-b4c8-44d0-9690-d7947297ac19"/>
-    <ds:schemaRef ds:uri="http://schemas.microsoft.com/office/2006/documentManagement/types"/>
-    <ds:schemaRef ds:uri="http://schemas.microsoft.com/office/infopath/2007/PartnerControls"/>
-    <ds:schemaRef ds:uri="http://schemas.openxmlformats.org/package/2006/metadata/core-properties"/>
-    <ds:schemaRef ds:uri="http://purl.org/dc/elements/1.1/"/>
-    <ds:schemaRef ds:uri="http://purl.org/dc/terms/"/>
-    <ds:schemaRef ds:uri="http://schemas.microsoft.com/internal/obd"/>
+    <ds:schemaRef ds:uri="http://schemas.microsoft.com/sharepoint/v3/contenttype/forms"/>
   </ds:schemaRefs>
 </ds:datastoreItem>
 </file>
@@ -5928,9 +6095,20 @@
 </file>
 
 <file path=customXml/itemProps3.xml><?xml version="1.0" encoding="utf-8"?>
-<ds:datastoreItem xmlns:ds="http://schemas.openxmlformats.org/officeDocument/2006/customXml" ds:itemID="{47CF5FD6-43E2-4C9A-9372-C9D60EE1772B}">
+<ds:datastoreItem xmlns:ds="http://schemas.openxmlformats.org/officeDocument/2006/customXml" ds:itemID="{0BED3A9D-D1E4-45EA-8B49-CB6F60C2A98A}">
   <ds:schemaRefs>
-    <ds:schemaRef ds:uri="http://schemas.microsoft.com/sharepoint/v3/contenttype/forms"/>
+    <ds:schemaRef ds:uri="http://schemas.microsoft.com/office/2006/metadata/contentType"/>
+    <ds:schemaRef ds:uri="http://schemas.microsoft.com/office/2006/metadata/properties/metaAttributes"/>
+    <ds:schemaRef ds:uri="http://www.w3.org/2001/XMLSchema"/>
+    <ds:schemaRef ds:uri="http://schemas.microsoft.com/office/2006/metadata/properties"/>
+    <ds:schemaRef ds:uri="b106c448-c3d1-41cc-8fd9-3acb307364b4"/>
+    <ds:schemaRef ds:uri="b043894e-b4c8-44d0-9690-d7947297ac19"/>
+    <ds:schemaRef ds:uri="http://schemas.microsoft.com/office/2006/documentManagement/types"/>
+    <ds:schemaRef ds:uri="http://schemas.microsoft.com/office/infopath/2007/PartnerControls"/>
+    <ds:schemaRef ds:uri="http://schemas.openxmlformats.org/package/2006/metadata/core-properties"/>
+    <ds:schemaRef ds:uri="http://purl.org/dc/elements/1.1/"/>
+    <ds:schemaRef ds:uri="http://purl.org/dc/terms/"/>
+    <ds:schemaRef ds:uri="http://schemas.microsoft.com/internal/obd"/>
   </ds:schemaRefs>
 </ds:datastoreItem>
 </file>

--- a/aca/TheContextractors_H4R2026_Ch11.pptx
+++ b/aca/TheContextractors_H4R2026_Ch11.pptx
@@ -333,7 +333,7 @@
           <a:p>
             <a:fld id="{47371D93-8784-4C02-8B2C-86355AB378F9}" type="slidenum">
               <a:rPr lang="de-DE" smtClean="0"/>
-              <a:t>‹Nr.›</a:t>
+              <a:t>‹#›</a:t>
             </a:fld>
             <a:endParaRPr lang="de-DE"/>
           </a:p>
@@ -533,7 +533,7 @@
           <a:p>
             <a:fld id="{47371D93-8784-4C02-8B2C-86355AB378F9}" type="slidenum">
               <a:rPr lang="de-DE" smtClean="0"/>
-              <a:t>‹Nr.›</a:t>
+              <a:t>‹#›</a:t>
             </a:fld>
             <a:endParaRPr lang="de-DE"/>
           </a:p>
@@ -743,7 +743,7 @@
           <a:p>
             <a:fld id="{47371D93-8784-4C02-8B2C-86355AB378F9}" type="slidenum">
               <a:rPr lang="de-DE" smtClean="0"/>
-              <a:t>‹Nr.›</a:t>
+              <a:t>‹#›</a:t>
             </a:fld>
             <a:endParaRPr lang="de-DE"/>
           </a:p>
@@ -943,7 +943,7 @@
           <a:p>
             <a:fld id="{47371D93-8784-4C02-8B2C-86355AB378F9}" type="slidenum">
               <a:rPr lang="de-DE" smtClean="0"/>
-              <a:t>‹Nr.›</a:t>
+              <a:t>‹#›</a:t>
             </a:fld>
             <a:endParaRPr lang="de-DE"/>
           </a:p>
@@ -1219,7 +1219,7 @@
           <a:p>
             <a:fld id="{47371D93-8784-4C02-8B2C-86355AB378F9}" type="slidenum">
               <a:rPr lang="de-DE" smtClean="0"/>
-              <a:t>‹Nr.›</a:t>
+              <a:t>‹#›</a:t>
             </a:fld>
             <a:endParaRPr lang="de-DE"/>
           </a:p>
@@ -1487,7 +1487,7 @@
           <a:p>
             <a:fld id="{47371D93-8784-4C02-8B2C-86355AB378F9}" type="slidenum">
               <a:rPr lang="de-DE" smtClean="0"/>
-              <a:t>‹Nr.›</a:t>
+              <a:t>‹#›</a:t>
             </a:fld>
             <a:endParaRPr lang="de-DE"/>
           </a:p>
@@ -1902,7 +1902,7 @@
           <a:p>
             <a:fld id="{47371D93-8784-4C02-8B2C-86355AB378F9}" type="slidenum">
               <a:rPr lang="de-DE" smtClean="0"/>
-              <a:t>‹Nr.›</a:t>
+              <a:t>‹#›</a:t>
             </a:fld>
             <a:endParaRPr lang="de-DE"/>
           </a:p>
@@ -2044,7 +2044,7 @@
           <a:p>
             <a:fld id="{47371D93-8784-4C02-8B2C-86355AB378F9}" type="slidenum">
               <a:rPr lang="de-DE" smtClean="0"/>
-              <a:t>‹Nr.›</a:t>
+              <a:t>‹#›</a:t>
             </a:fld>
             <a:endParaRPr lang="de-DE"/>
           </a:p>
@@ -2157,7 +2157,7 @@
           <a:p>
             <a:fld id="{47371D93-8784-4C02-8B2C-86355AB378F9}" type="slidenum">
               <a:rPr lang="de-DE" smtClean="0"/>
-              <a:t>‹Nr.›</a:t>
+              <a:t>‹#›</a:t>
             </a:fld>
             <a:endParaRPr lang="de-DE"/>
           </a:p>
@@ -2470,7 +2470,7 @@
           <a:p>
             <a:fld id="{47371D93-8784-4C02-8B2C-86355AB378F9}" type="slidenum">
               <a:rPr lang="de-DE" smtClean="0"/>
-              <a:t>‹Nr.›</a:t>
+              <a:t>‹#›</a:t>
             </a:fld>
             <a:endParaRPr lang="de-DE"/>
           </a:p>
@@ -2763,7 +2763,7 @@
           <a:p>
             <a:fld id="{47371D93-8784-4C02-8B2C-86355AB378F9}" type="slidenum">
               <a:rPr lang="de-DE" smtClean="0"/>
-              <a:t>‹Nr.›</a:t>
+              <a:t>‹#›</a:t>
             </a:fld>
             <a:endParaRPr lang="de-DE"/>
           </a:p>
@@ -3040,7 +3040,7 @@
           <a:p>
             <a:fld id="{47371D93-8784-4C02-8B2C-86355AB378F9}" type="slidenum">
               <a:rPr lang="de-DE" smtClean="0"/>
-              <a:t>‹Nr.›</a:t>
+              <a:t>‹#›</a:t>
             </a:fld>
             <a:endParaRPr lang="de-DE"/>
           </a:p>
@@ -3443,7 +3443,7 @@
           <a:p>
             <a:r>
               <a:rPr dirty="0"/>
-              <a:t>Hack4Rail 2026 – Team A38</a:t>
+              <a:t>Hack4Rail 2026</a:t>
             </a:r>
           </a:p>
         </p:txBody>
@@ -5804,27 +5804,6 @@
 </file>
 
 <file path=customXml/item1.xml><?xml version="1.0" encoding="utf-8"?>
-<?mso-contentType ?>
-<FormTemplates xmlns="http://schemas.microsoft.com/sharepoint/v3/contenttype/forms">
-  <Display>DocumentLibraryForm</Display>
-  <Edit>DocumentLibraryForm</Edit>
-  <New>DocumentLibraryForm</New>
-</FormTemplates>
-</file>
-
-<file path=customXml/item2.xml><?xml version="1.0" encoding="utf-8"?>
-<p:properties xmlns:p="http://schemas.microsoft.com/office/2006/metadata/properties" xmlns:xsi="http://www.w3.org/2001/XMLSchema-instance" xmlns:pc="http://schemas.microsoft.com/office/infopath/2007/PartnerControls">
-  <documentManagement>
-    <Copyright xmlns="b106c448-c3d1-41cc-8fd9-3acb307364b4" xsi:nil="true"/>
-    <lcf76f155ced4ddcb4097134ff3c332f xmlns="b106c448-c3d1-41cc-8fd9-3acb307364b4">
-      <Terms xmlns="http://schemas.microsoft.com/office/infopath/2007/PartnerControls"/>
-    </lcf76f155ced4ddcb4097134ff3c332f>
-    <TaxCatchAll xmlns="b043894e-b4c8-44d0-9690-d7947297ac19" xsi:nil="true"/>
-  </documentManagement>
-</p:properties>
-</file>
-
-<file path=customXml/item3.xml><?xml version="1.0" encoding="utf-8"?>
 <ct:contentTypeSchema xmlns:ct="http://schemas.microsoft.com/office/2006/metadata/contentType" xmlns:ma="http://schemas.microsoft.com/office/2006/metadata/properties/metaAttributes" ct:_="" ma:_="" ma:contentTypeName="Dokument" ma:contentTypeID="0x010100C5895299445B8C4DB378BBB718B1F939" ma:contentTypeVersion="18" ma:contentTypeDescription="Ein neues Dokument erstellen." ma:contentTypeScope="" ma:versionID="ca18c32604eb9eb075bdd5b520f76d7f">
   <xsd:schema xmlns:xsd="http://www.w3.org/2001/XMLSchema" xmlns:xs="http://www.w3.org/2001/XMLSchema" xmlns:p="http://schemas.microsoft.com/office/2006/metadata/properties" xmlns:ns2="b106c448-c3d1-41cc-8fd9-3acb307364b4" xmlns:ns3="b043894e-b4c8-44d0-9690-d7947297ac19" targetNamespace="http://schemas.microsoft.com/office/2006/metadata/properties" ma:root="true" ma:fieldsID="0e0a0918b2fa3636e306fde1bc5c258b" ns2:_="" ns3:_="">
     <xsd:import namespace="b106c448-c3d1-41cc-8fd9-3acb307364b4"/>
@@ -6069,10 +6048,42 @@
 </ct:contentTypeSchema>
 </file>
 
+<file path=customXml/item2.xml><?xml version="1.0" encoding="utf-8"?>
+<p:properties xmlns:p="http://schemas.microsoft.com/office/2006/metadata/properties" xmlns:xsi="http://www.w3.org/2001/XMLSchema-instance" xmlns:pc="http://schemas.microsoft.com/office/infopath/2007/PartnerControls">
+  <documentManagement>
+    <Copyright xmlns="b106c448-c3d1-41cc-8fd9-3acb307364b4" xsi:nil="true"/>
+    <lcf76f155ced4ddcb4097134ff3c332f xmlns="b106c448-c3d1-41cc-8fd9-3acb307364b4">
+      <Terms xmlns="http://schemas.microsoft.com/office/infopath/2007/PartnerControls"/>
+    </lcf76f155ced4ddcb4097134ff3c332f>
+    <TaxCatchAll xmlns="b043894e-b4c8-44d0-9690-d7947297ac19" xsi:nil="true"/>
+  </documentManagement>
+</p:properties>
+</file>
+
+<file path=customXml/item3.xml><?xml version="1.0" encoding="utf-8"?>
+<?mso-contentType ?>
+<FormTemplates xmlns="http://schemas.microsoft.com/sharepoint/v3/contenttype/forms">
+  <Display>DocumentLibraryForm</Display>
+  <Edit>DocumentLibraryForm</Edit>
+  <New>DocumentLibraryForm</New>
+</FormTemplates>
+</file>
+
 <file path=customXml/itemProps1.xml><?xml version="1.0" encoding="utf-8"?>
-<ds:datastoreItem xmlns:ds="http://schemas.openxmlformats.org/officeDocument/2006/customXml" ds:itemID="{47CF5FD6-43E2-4C9A-9372-C9D60EE1772B}">
+<ds:datastoreItem xmlns:ds="http://schemas.openxmlformats.org/officeDocument/2006/customXml" ds:itemID="{0BED3A9D-D1E4-45EA-8B49-CB6F60C2A98A}">
   <ds:schemaRefs>
-    <ds:schemaRef ds:uri="http://schemas.microsoft.com/sharepoint/v3/contenttype/forms"/>
+    <ds:schemaRef ds:uri="http://schemas.microsoft.com/office/2006/metadata/contentType"/>
+    <ds:schemaRef ds:uri="http://schemas.microsoft.com/office/2006/metadata/properties/metaAttributes"/>
+    <ds:schemaRef ds:uri="http://www.w3.org/2001/XMLSchema"/>
+    <ds:schemaRef ds:uri="http://schemas.microsoft.com/office/2006/metadata/properties"/>
+    <ds:schemaRef ds:uri="b106c448-c3d1-41cc-8fd9-3acb307364b4"/>
+    <ds:schemaRef ds:uri="b043894e-b4c8-44d0-9690-d7947297ac19"/>
+    <ds:schemaRef ds:uri="http://schemas.microsoft.com/office/2006/documentManagement/types"/>
+    <ds:schemaRef ds:uri="http://schemas.microsoft.com/office/infopath/2007/PartnerControls"/>
+    <ds:schemaRef ds:uri="http://schemas.openxmlformats.org/package/2006/metadata/core-properties"/>
+    <ds:schemaRef ds:uri="http://purl.org/dc/elements/1.1/"/>
+    <ds:schemaRef ds:uri="http://purl.org/dc/terms/"/>
+    <ds:schemaRef ds:uri="http://schemas.microsoft.com/internal/obd"/>
   </ds:schemaRefs>
 </ds:datastoreItem>
 </file>
@@ -6095,20 +6106,9 @@
 </file>
 
 <file path=customXml/itemProps3.xml><?xml version="1.0" encoding="utf-8"?>
-<ds:datastoreItem xmlns:ds="http://schemas.openxmlformats.org/officeDocument/2006/customXml" ds:itemID="{0BED3A9D-D1E4-45EA-8B49-CB6F60C2A98A}">
+<ds:datastoreItem xmlns:ds="http://schemas.openxmlformats.org/officeDocument/2006/customXml" ds:itemID="{47CF5FD6-43E2-4C9A-9372-C9D60EE1772B}">
   <ds:schemaRefs>
-    <ds:schemaRef ds:uri="http://schemas.microsoft.com/office/2006/metadata/contentType"/>
-    <ds:schemaRef ds:uri="http://schemas.microsoft.com/office/2006/metadata/properties/metaAttributes"/>
-    <ds:schemaRef ds:uri="http://www.w3.org/2001/XMLSchema"/>
-    <ds:schemaRef ds:uri="http://schemas.microsoft.com/office/2006/metadata/properties"/>
-    <ds:schemaRef ds:uri="b106c448-c3d1-41cc-8fd9-3acb307364b4"/>
-    <ds:schemaRef ds:uri="b043894e-b4c8-44d0-9690-d7947297ac19"/>
-    <ds:schemaRef ds:uri="http://schemas.microsoft.com/office/2006/documentManagement/types"/>
-    <ds:schemaRef ds:uri="http://schemas.microsoft.com/office/infopath/2007/PartnerControls"/>
-    <ds:schemaRef ds:uri="http://schemas.openxmlformats.org/package/2006/metadata/core-properties"/>
-    <ds:schemaRef ds:uri="http://purl.org/dc/elements/1.1/"/>
-    <ds:schemaRef ds:uri="http://purl.org/dc/terms/"/>
-    <ds:schemaRef ds:uri="http://schemas.microsoft.com/internal/obd"/>
+    <ds:schemaRef ds:uri="http://schemas.microsoft.com/sharepoint/v3/contenttype/forms"/>
   </ds:schemaRefs>
 </ds:datastoreItem>
 </file>
